--- a/Venture_Creed_Case_Study_Answers.pptx
+++ b/Venture_Creed_Case_Study_Answers.pptx
@@ -15,6 +15,8 @@
     <p:sldId id="263" r:id="rId14"/>
     <p:sldId id="264" r:id="rId15"/>
     <p:sldId id="265" r:id="rId16"/>
+    <p:sldId id="266" r:id="rId17"/>
+    <p:sldId id="267" r:id="rId18"/>
   </p:sldIdLst>
   <p:sldSz cx="12191695" cy="6858000" type="screen4x3"/>
   <p:notesSz cx="6858000" cy="9144000"/>
@@ -3148,8 +3150,8 @@
         </p:nvSpPr>
         <p:spPr>
           <a:xfrm>
-            <a:off x="914400" y="2377440"/>
-            <a:ext cx="10332720" cy="1828800"/>
+            <a:off x="914400" y="2286000"/>
+            <a:ext cx="10332720" cy="2103120"/>
           </a:xfrm>
           <a:prstGeom prst="rect">
             <a:avLst/>
@@ -3184,16 +3186,16 @@
           <a:p>
             <a:pPr>
               <a:spcBef>
-                <a:spcPts val="3000"/>
+                <a:spcPts val="2400"/>
               </a:spcBef>
             </a:pPr>
             <a:r>
-              <a:rPr sz="1400" i="1">
+              <a:rPr sz="1300" i="1">
                 <a:solidFill>
                   <a:srgbClr val="9AA6B8"/>
                 </a:solidFill>
               </a:rPr>
-              <a:t>Approach, model, visualization, data quality, and validation plan</a:t>
+              <a:t>Final model silhouette 0.393 (+93% vs. a naive baseline) · near-perfect stability (ARI≈1.0) · validated against 3 alternative algorithms</a:t>
             </a:r>
           </a:p>
         </p:txBody>
@@ -3239,12 +3241,12 @@
           <a:lstStyle/>
           <a:p>
             <a:r>
-              <a:rPr sz="2800" b="1">
+              <a:rPr sz="2700" b="1">
                 <a:solidFill>
                   <a:srgbClr val="1F2A44"/>
                 </a:solidFill>
               </a:rPr>
-              <a:t>Assumptions Taken</a:t>
+              <a:t>Q5. Data Quality Issues Identified</a:t>
             </a:r>
           </a:p>
         </p:txBody>
@@ -3272,2236 +3274,7 @@
           <a:lstStyle/>
           <a:p>
             <a:r>
-              <a:rPr sz="1400" i="1">
-                <a:solidFill>
-                  <a:srgbClr val="555555"/>
-                </a:solidFill>
-              </a:rPr>
-              <a:t>Highlighted per case-study instructions</a:t>
-            </a:r>
-          </a:p>
-        </p:txBody>
-      </p:sp>
-      <p:sp>
-        <p:nvSpPr>
-          <p:cNvPr id="4" name="Rectangle 3"/>
-          <p:cNvSpPr/>
-          <p:nvPr/>
-        </p:nvSpPr>
-        <p:spPr>
-          <a:xfrm>
-            <a:off x="457200" y="1188720"/>
-            <a:ext cx="11247120" cy="25400"/>
-          </a:xfrm>
-          <a:prstGeom prst="rect">
-            <a:avLst/>
-          </a:prstGeom>
-          <a:solidFill>
-            <a:srgbClr val="C0392B"/>
-          </a:solidFill>
-          <a:ln>
-            <a:noFill/>
-          </a:ln>
-        </p:spPr>
-        <p:style>
-          <a:lnRef idx="1">
-            <a:schemeClr val="accent1"/>
-          </a:lnRef>
-          <a:fillRef idx="3">
-            <a:schemeClr val="accent1"/>
-          </a:fillRef>
-          <a:effectRef idx="2">
-            <a:schemeClr val="accent1"/>
-          </a:effectRef>
-          <a:fontRef idx="minor">
-            <a:schemeClr val="lt1"/>
-          </a:fontRef>
-        </p:style>
-        <p:txBody>
-          <a:bodyPr rtlCol="0" anchor="ctr"/>
-          <a:lstStyle/>
-          <a:p>
-            <a:pPr algn="ctr"/>
-          </a:p>
-        </p:txBody>
-      </p:sp>
-      <p:sp>
-        <p:nvSpPr>
-          <p:cNvPr id="5" name="TextBox 4"/>
-          <p:cNvSpPr txBox="1"/>
-          <p:nvPr/>
-        </p:nvSpPr>
-        <p:spPr>
-          <a:xfrm>
-            <a:off x="457200" y="1417320"/>
-            <a:ext cx="11247120" cy="5349240"/>
-          </a:xfrm>
-          <a:prstGeom prst="rect">
-            <a:avLst/>
-          </a:prstGeom>
-          <a:noFill/>
-        </p:spPr>
-        <p:txBody>
-          <a:bodyPr wrap="square">
-            <a:normAutofit/>
-          </a:bodyPr>
-          <a:lstStyle/>
-          <a:p>
-            <a:pPr>
-              <a:spcAft>
-                <a:spcPts val="800"/>
-              </a:spcAft>
-            </a:pPr>
-            <a:r>
-              <a:rPr sz="1600">
-                <a:solidFill>
-                  <a:srgbClr val="1F2A44"/>
-                </a:solidFill>
-              </a:rPr>
-              <a:t>•  Segments already marked Not_Assigned/None/– for a customer reflect “not computed / not applicable yet”, not a true zero value, and were preserved as an explicit category rather than imputed.</a:t>
-            </a:r>
-          </a:p>
-          <a:p>
-            <a:pPr>
-              <a:spcAft>
-                <a:spcPts val="800"/>
-              </a:spcAft>
-            </a:pPr>
-            <a:r>
-              <a:rPr sz="1600">
-                <a:solidFill>
-                  <a:srgbClr val="1F2A44"/>
-                </a:solidFill>
-              </a:rPr>
-              <a:t>•  Customers missing all 6 core behavioral segments are assumed to have no usable purchasing history yet (new or dormant accounts) and are reported as a separate business segment rather than clustered on missing data.</a:t>
-            </a:r>
-          </a:p>
-          <a:p>
-            <a:pPr>
-              <a:spcAft>
-                <a:spcPts val="800"/>
-              </a:spcAft>
-            </a:pPr>
-            <a:r>
-              <a:rPr sz="1600">
-                <a:solidFill>
-                  <a:srgbClr val="1F2A44"/>
-                </a:solidFill>
-              </a:rPr>
-              <a:t>•  Duplicate-looking records (identical fields aside from Customer_ID, or shared addresses) are treated as distinct accounts for this exercise — flagged for business confirmation rather than merged, since merging without domain input risks losing genuinely separate accounts (e.g. multiple properties).</a:t>
-            </a:r>
-          </a:p>
-          <a:p>
-            <a:pPr>
-              <a:spcAft>
-                <a:spcPts val="800"/>
-              </a:spcAft>
-            </a:pPr>
-            <a:r>
-              <a:rPr sz="1600">
-                <a:solidFill>
-                  <a:srgbClr val="1F2A44"/>
-                </a:solidFill>
-              </a:rPr>
-              <a:t>•  Geographic behavior is assumed to be adequately captured by Competitiveness_Flag / Volume_Segment / Density_Segment, making raw City/State/Country redundant for a *behavioral* clustering (as opposed to a purely geographic one).</a:t>
-            </a:r>
-          </a:p>
-          <a:p>
-            <a:pPr>
-              <a:spcAft>
-                <a:spcPts val="800"/>
-              </a:spcAft>
-            </a:pPr>
-            <a:r>
-              <a:rPr sz="1600">
-                <a:solidFill>
-                  <a:srgbClr val="1F2A44"/>
-                </a:solidFill>
-              </a:rPr>
-              <a:t>•  k=6 (plus the separate not-yet-profiled group) is treated as the primary recommendation; the notebook exposes k=2–8 so the business can revisit granularity as strategy needs evolve.</a:t>
-            </a:r>
-          </a:p>
-        </p:txBody>
-      </p:sp>
-    </p:spTree>
-  </p:cSld>
-  <p:clrMapOvr>
-    <a:masterClrMapping/>
-  </p:clrMapOvr>
-</p:sld>
-</file>
-
-<file path=ppt/slides/slide2.xml><?xml version="1.0" encoding="utf-8"?>
-<p:sld xmlns:a="http://schemas.openxmlformats.org/drawingml/2006/main" xmlns:p="http://schemas.openxmlformats.org/presentationml/2006/main" xmlns:r="http://schemas.openxmlformats.org/officeDocument/2006/relationships">
-  <p:cSld>
-    <p:spTree>
-      <p:nvGrpSpPr>
-        <p:cNvPr id="1" name=""/>
-        <p:cNvGrpSpPr/>
-        <p:nvPr/>
-      </p:nvGrpSpPr>
-      <p:grpSpPr/>
-      <p:sp>
-        <p:nvSpPr>
-          <p:cNvPr id="2" name="TextBox 1"/>
-          <p:cNvSpPr txBox="1"/>
-          <p:nvPr/>
-        </p:nvSpPr>
-        <p:spPr>
-          <a:xfrm>
-            <a:off x="457200" y="274320"/>
-            <a:ext cx="11247120" cy="822960"/>
-          </a:xfrm>
-          <a:prstGeom prst="rect">
-            <a:avLst/>
-          </a:prstGeom>
-          <a:noFill/>
-        </p:spPr>
-        <p:txBody>
-          <a:bodyPr wrap="square">
-            <a:spAutoFit/>
-          </a:bodyPr>
-          <a:lstStyle/>
-          <a:p>
-            <a:r>
-              <a:rPr sz="2800" b="1">
-                <a:solidFill>
-                  <a:srgbClr val="1F2A44"/>
-                </a:solidFill>
-              </a:rPr>
-              <a:t>Approach Overview</a:t>
-            </a:r>
-          </a:p>
-        </p:txBody>
-      </p:sp>
-      <p:sp>
-        <p:nvSpPr>
-          <p:cNvPr id="3" name="TextBox 2"/>
-          <p:cNvSpPr txBox="1"/>
-          <p:nvPr/>
-        </p:nvSpPr>
-        <p:spPr>
-          <a:xfrm>
-            <a:off x="457200" y="868680"/>
-            <a:ext cx="11247120" cy="365760"/>
-          </a:xfrm>
-          <a:prstGeom prst="rect">
-            <a:avLst/>
-          </a:prstGeom>
-          <a:noFill/>
-        </p:spPr>
-        <p:txBody>
-          <a:bodyPr wrap="none">
-            <a:spAutoFit/>
-          </a:bodyPr>
-          <a:lstStyle/>
-          <a:p>
-            <a:r>
-              <a:rPr sz="1400" i="1">
-                <a:solidFill>
-                  <a:srgbClr val="555555"/>
-                </a:solidFill>
-              </a:rPr>
-              <a:t>How the six questions map to one coherent pipeline</a:t>
-            </a:r>
-          </a:p>
-        </p:txBody>
-      </p:sp>
-      <p:sp>
-        <p:nvSpPr>
-          <p:cNvPr id="4" name="Rectangle 3"/>
-          <p:cNvSpPr/>
-          <p:nvPr/>
-        </p:nvSpPr>
-        <p:spPr>
-          <a:xfrm>
-            <a:off x="457200" y="1188720"/>
-            <a:ext cx="11247120" cy="25400"/>
-          </a:xfrm>
-          <a:prstGeom prst="rect">
-            <a:avLst/>
-          </a:prstGeom>
-          <a:solidFill>
-            <a:srgbClr val="C0392B"/>
-          </a:solidFill>
-          <a:ln>
-            <a:noFill/>
-          </a:ln>
-        </p:spPr>
-        <p:style>
-          <a:lnRef idx="1">
-            <a:schemeClr val="accent1"/>
-          </a:lnRef>
-          <a:fillRef idx="3">
-            <a:schemeClr val="accent1"/>
-          </a:fillRef>
-          <a:effectRef idx="2">
-            <a:schemeClr val="accent1"/>
-          </a:effectRef>
-          <a:fontRef idx="minor">
-            <a:schemeClr val="lt1"/>
-          </a:fontRef>
-        </p:style>
-        <p:txBody>
-          <a:bodyPr rtlCol="0" anchor="ctr"/>
-          <a:lstStyle/>
-          <a:p>
-            <a:pPr algn="ctr"/>
-          </a:p>
-        </p:txBody>
-      </p:sp>
-      <p:sp>
-        <p:nvSpPr>
-          <p:cNvPr id="5" name="TextBox 4"/>
-          <p:cNvSpPr txBox="1"/>
-          <p:nvPr/>
-        </p:nvSpPr>
-        <p:spPr>
-          <a:xfrm>
-            <a:off x="457200" y="1417320"/>
-            <a:ext cx="11247120" cy="5349240"/>
-          </a:xfrm>
-          <a:prstGeom prst="rect">
-            <a:avLst/>
-          </a:prstGeom>
-          <a:noFill/>
-        </p:spPr>
-        <p:txBody>
-          <a:bodyPr wrap="square">
-            <a:normAutofit/>
-          </a:bodyPr>
-          <a:lstStyle/>
-          <a:p>
-            <a:pPr>
-              <a:spcAft>
-                <a:spcPts val="800"/>
-              </a:spcAft>
-            </a:pPr>
-            <a:r>
-              <a:rPr sz="1700">
-                <a:solidFill>
-                  <a:srgbClr val="1F2A44"/>
-                </a:solidFill>
-              </a:rPr>
-              <a:t>•  Dataset: 3,030 customers × 18 columns — 6 address/ID fields + 12 categorical business-segment features (no numeric columns).</a:t>
-            </a:r>
-          </a:p>
-          <a:p>
-            <a:pPr>
-              <a:spcAft>
-                <a:spcPts val="800"/>
-              </a:spcAft>
-            </a:pPr>
-            <a:r>
-              <a:rPr sz="1700">
-                <a:solidFill>
-                  <a:srgbClr val="1F2A44"/>
-                </a:solidFill>
-              </a:rPr>
-              <a:t>•  Step 1 — Data quality scan (Q5): unify inconsistent null markers, flag typos/duplicates/format issues.</a:t>
-            </a:r>
-          </a:p>
-          <a:p>
-            <a:pPr>
-              <a:spcAft>
-                <a:spcPts val="800"/>
-              </a:spcAft>
-            </a:pPr>
-            <a:r>
-              <a:rPr sz="1700">
-                <a:solidFill>
-                  <a:srgbClr val="1F2A44"/>
-                </a:solidFill>
-              </a:rPr>
-              <a:t>•  Step 2 — Feature selection (Q2): drop identifiers/high-cardinality address fields; separate customers with zero behavioral signal from the rest.</a:t>
-            </a:r>
-          </a:p>
-          <a:p>
-            <a:pPr>
-              <a:spcAft>
-                <a:spcPts val="800"/>
-              </a:spcAft>
-            </a:pPr>
-            <a:r>
-              <a:rPr sz="1700">
-                <a:solidFill>
-                  <a:srgbClr val="1F2A44"/>
-                </a:solidFill>
-              </a:rPr>
-              <a:t>•  Step 3 — Clustering (Q1): K-Modes on the 12 behavioral segments for the profiled customers; k chosen via cost + silhouette.</a:t>
-            </a:r>
-          </a:p>
-          <a:p>
-            <a:pPr>
-              <a:spcAft>
-                <a:spcPts val="800"/>
-              </a:spcAft>
-            </a:pPr>
-            <a:r>
-              <a:rPr sz="1700">
-                <a:solidFill>
-                  <a:srgbClr val="1F2A44"/>
-                </a:solidFill>
-              </a:rPr>
-              <a:t>•  Step 4 — Visualization (Q3): 2-D Multiple Correspondence Analysis (MCA), colored by cluster.</a:t>
-            </a:r>
-          </a:p>
-          <a:p>
-            <a:pPr>
-              <a:spcAft>
-                <a:spcPts val="800"/>
-              </a:spcAft>
-            </a:pPr>
-            <a:r>
-              <a:rPr sz="1700">
-                <a:solidFill>
-                  <a:srgbClr val="1F2A44"/>
-                </a:solidFill>
-              </a:rPr>
-              <a:t>•  Step 5 — Outlier detection (Q4): Attribute Value Frequency + distance-to-cluster-centroid, both suited to categorical data.</a:t>
-            </a:r>
-          </a:p>
-          <a:p>
-            <a:pPr>
-              <a:spcAft>
-                <a:spcPts val="800"/>
-              </a:spcAft>
-            </a:pPr>
-            <a:r>
-              <a:rPr sz="1700">
-                <a:solidFill>
-                  <a:srgbClr val="1F2A44"/>
-                </a:solidFill>
-              </a:rPr>
-              <a:t>•  Step 6 — Validation plan (Q6): stability, sensitivity, and business-facing checks before the segmentation is used operationally.</a:t>
-            </a:r>
-          </a:p>
-          <a:p>
-            <a:pPr>
-              <a:spcAft>
-                <a:spcPts val="800"/>
-              </a:spcAft>
-            </a:pPr>
-            <a:r>
-              <a:rPr sz="1700">
-                <a:solidFill>
-                  <a:srgbClr val="1F2A44"/>
-                </a:solidFill>
-              </a:rPr>
-              <a:t>•  All code lives in analysis/clustering_analysis.ipynb (executed, outputs embedded); all data outputs in analysis/outputs/.</a:t>
-            </a:r>
-          </a:p>
-        </p:txBody>
-      </p:sp>
-    </p:spTree>
-  </p:cSld>
-  <p:clrMapOvr>
-    <a:masterClrMapping/>
-  </p:clrMapOvr>
-</p:sld>
-</file>
-
-<file path=ppt/slides/slide3.xml><?xml version="1.0" encoding="utf-8"?>
-<p:sld xmlns:a="http://schemas.openxmlformats.org/drawingml/2006/main" xmlns:p="http://schemas.openxmlformats.org/presentationml/2006/main" xmlns:r="http://schemas.openxmlformats.org/officeDocument/2006/relationships">
-  <p:cSld>
-    <p:spTree>
-      <p:nvGrpSpPr>
-        <p:cNvPr id="1" name=""/>
-        <p:cNvGrpSpPr/>
-        <p:nvPr/>
-      </p:nvGrpSpPr>
-      <p:grpSpPr/>
-      <p:sp>
-        <p:nvSpPr>
-          <p:cNvPr id="2" name="TextBox 1"/>
-          <p:cNvSpPr txBox="1"/>
-          <p:nvPr/>
-        </p:nvSpPr>
-        <p:spPr>
-          <a:xfrm>
-            <a:off x="457200" y="274320"/>
-            <a:ext cx="11247120" cy="822960"/>
-          </a:xfrm>
-          <a:prstGeom prst="rect">
-            <a:avLst/>
-          </a:prstGeom>
-          <a:noFill/>
-        </p:spPr>
-        <p:txBody>
-          <a:bodyPr wrap="square">
-            <a:spAutoFit/>
-          </a:bodyPr>
-          <a:lstStyle/>
-          <a:p>
-            <a:r>
-              <a:rPr sz="2800" b="1">
-                <a:solidFill>
-                  <a:srgbClr val="1F2A44"/>
-                </a:solidFill>
-              </a:rPr>
-              <a:t>Q1. Clustering Logic &amp; Algorithm</a:t>
-            </a:r>
-          </a:p>
-        </p:txBody>
-      </p:sp>
-      <p:sp>
-        <p:nvSpPr>
-          <p:cNvPr id="3" name="TextBox 2"/>
-          <p:cNvSpPr txBox="1"/>
-          <p:nvPr/>
-        </p:nvSpPr>
-        <p:spPr>
-          <a:xfrm>
-            <a:off x="457200" y="868680"/>
-            <a:ext cx="11247120" cy="365760"/>
-          </a:xfrm>
-          <a:prstGeom prst="rect">
-            <a:avLst/>
-          </a:prstGeom>
-          <a:noFill/>
-        </p:spPr>
-        <p:txBody>
-          <a:bodyPr wrap="none">
-            <a:spAutoFit/>
-          </a:bodyPr>
-          <a:lstStyle/>
-          <a:p>
-            <a:r>
-              <a:rPr sz="1400" i="1">
-                <a:solidFill>
-                  <a:srgbClr val="555555"/>
-                </a:solidFill>
-              </a:rPr>
-              <a:t>K-Modes on categorical purchasing-behavior segments</a:t>
-            </a:r>
-          </a:p>
-        </p:txBody>
-      </p:sp>
-      <p:sp>
-        <p:nvSpPr>
-          <p:cNvPr id="4" name="Rectangle 3"/>
-          <p:cNvSpPr/>
-          <p:nvPr/>
-        </p:nvSpPr>
-        <p:spPr>
-          <a:xfrm>
-            <a:off x="457200" y="1188720"/>
-            <a:ext cx="11247120" cy="25400"/>
-          </a:xfrm>
-          <a:prstGeom prst="rect">
-            <a:avLst/>
-          </a:prstGeom>
-          <a:solidFill>
-            <a:srgbClr val="C0392B"/>
-          </a:solidFill>
-          <a:ln>
-            <a:noFill/>
-          </a:ln>
-        </p:spPr>
-        <p:style>
-          <a:lnRef idx="1">
-            <a:schemeClr val="accent1"/>
-          </a:lnRef>
-          <a:fillRef idx="3">
-            <a:schemeClr val="accent1"/>
-          </a:fillRef>
-          <a:effectRef idx="2">
-            <a:schemeClr val="accent1"/>
-          </a:effectRef>
-          <a:fontRef idx="minor">
-            <a:schemeClr val="lt1"/>
-          </a:fontRef>
-        </p:style>
-        <p:txBody>
-          <a:bodyPr rtlCol="0" anchor="ctr"/>
-          <a:lstStyle/>
-          <a:p>
-            <a:pPr algn="ctr"/>
-          </a:p>
-        </p:txBody>
-      </p:sp>
-      <p:sp>
-        <p:nvSpPr>
-          <p:cNvPr id="5" name="TextBox 4"/>
-          <p:cNvSpPr txBox="1"/>
-          <p:nvPr/>
-        </p:nvSpPr>
-        <p:spPr>
-          <a:xfrm>
-            <a:off x="457200" y="1417320"/>
-            <a:ext cx="11247120" cy="5349240"/>
-          </a:xfrm>
-          <a:prstGeom prst="rect">
-            <a:avLst/>
-          </a:prstGeom>
-          <a:noFill/>
-        </p:spPr>
-        <p:txBody>
-          <a:bodyPr wrap="square">
-            <a:normAutofit/>
-          </a:bodyPr>
-          <a:lstStyle/>
-          <a:p>
-            <a:pPr>
-              <a:spcAft>
-                <a:spcPts val="800"/>
-              </a:spcAft>
-            </a:pPr>
-            <a:r>
-              <a:rPr sz="1600">
-                <a:solidFill>
-                  <a:srgbClr val="1F2A44"/>
-                </a:solidFill>
-              </a:rPr>
-              <a:t>•  All retained features are categorical (ordinal or nominal) — K-Means / Euclidean distance do not apply.</a:t>
-            </a:r>
-          </a:p>
-          <a:p>
-            <a:pPr>
-              <a:spcAft>
-                <a:spcPts val="800"/>
-              </a:spcAft>
-            </a:pPr>
-            <a:r>
-              <a:rPr sz="1600">
-                <a:solidFill>
-                  <a:srgbClr val="1F2A44"/>
-                </a:solidFill>
-              </a:rPr>
-              <a:t>•  K-Modes (Huang, 1998) is used instead: cluster centers are the modal category per feature; dissimilarity between two customers = fraction of the 12 features where their values differ (simple matching dissimilarity).</a:t>
-            </a:r>
-          </a:p>
-          <a:p>
-            <a:pPr>
-              <a:spcAft>
-                <a:spcPts val="800"/>
-              </a:spcAft>
-            </a:pPr>
-            <a:r>
-              <a:rPr sz="1600">
-                <a:solidFill>
-                  <a:srgbClr val="1F2A44"/>
-                </a:solidFill>
-              </a:rPr>
-              <a:t>•  Customers are first split into “behaviorally scored” (n=1,241) vs. “not-yet-profiled” (n=1,789, all 6 core segments unset) — clustering only the scored group avoids one giant cluster driven purely by missing data (see Q2).</a:t>
-            </a:r>
-          </a:p>
-          <a:p>
-            <a:pPr>
-              <a:spcAft>
-                <a:spcPts val="800"/>
-              </a:spcAft>
-            </a:pPr>
-            <a:r>
-              <a:rPr sz="1600">
-                <a:solidFill>
-                  <a:srgbClr val="1F2A44"/>
-                </a:solidFill>
-              </a:rPr>
-              <a:t>•  Choosing k: tracked K-Modes cost (elbow) and silhouette score (on the full pairwise Hamming-distance matrix) for k = 2–8.</a:t>
-            </a:r>
-          </a:p>
-          <a:p>
-            <a:pPr>
-              <a:spcAft>
-                <a:spcPts val="800"/>
-              </a:spcAft>
-            </a:pPr>
-            <a:r>
-              <a:rPr sz="1600">
-                <a:solidFill>
-                  <a:srgbClr val="1F2A44"/>
-                </a:solidFill>
-              </a:rPr>
-              <a:t>•  Cost drops sharply and silhouette roughly doubles (0.14 → 0.20) going from k=5 to k=6; k=7 gives only a marginal further gain at the cost of one small, less interpretable cluster → k = 6 selected.</a:t>
-            </a:r>
-          </a:p>
-          <a:p>
-            <a:pPr>
-              <a:spcAft>
-                <a:spcPts val="800"/>
-              </a:spcAft>
-            </a:pPr>
-            <a:r>
-              <a:rPr sz="1600">
-                <a:solidFill>
-                  <a:srgbClr val="1F2A44"/>
-                </a:solidFill>
-              </a:rPr>
-              <a:t>•  Result: 6 behavioral clusters + 1 “not-yet-profiled” group = 7 customer segments covering all 3,030 accounts.</a:t>
-            </a:r>
-          </a:p>
-        </p:txBody>
-      </p:sp>
-    </p:spTree>
-  </p:cSld>
-  <p:clrMapOvr>
-    <a:masterClrMapping/>
-  </p:clrMapOvr>
-</p:sld>
-</file>
-
-<file path=ppt/slides/slide4.xml><?xml version="1.0" encoding="utf-8"?>
-<p:sld xmlns:a="http://schemas.openxmlformats.org/drawingml/2006/main" xmlns:p="http://schemas.openxmlformats.org/presentationml/2006/main" xmlns:r="http://schemas.openxmlformats.org/officeDocument/2006/relationships">
-  <p:cSld>
-    <p:spTree>
-      <p:nvGrpSpPr>
-        <p:cNvPr id="1" name=""/>
-        <p:cNvGrpSpPr/>
-        <p:nvPr/>
-      </p:nvGrpSpPr>
-      <p:grpSpPr/>
-      <p:sp>
-        <p:nvSpPr>
-          <p:cNvPr id="2" name="TextBox 1"/>
-          <p:cNvSpPr txBox="1"/>
-          <p:nvPr/>
-        </p:nvSpPr>
-        <p:spPr>
-          <a:xfrm>
-            <a:off x="457200" y="274320"/>
-            <a:ext cx="11247120" cy="822960"/>
-          </a:xfrm>
-          <a:prstGeom prst="rect">
-            <a:avLst/>
-          </a:prstGeom>
-          <a:noFill/>
-        </p:spPr>
-        <p:txBody>
-          <a:bodyPr wrap="square">
-            <a:spAutoFit/>
-          </a:bodyPr>
-          <a:lstStyle/>
-          <a:p>
-            <a:r>
-              <a:rPr sz="2800" b="1">
-                <a:solidFill>
-                  <a:srgbClr val="1F2A44"/>
-                </a:solidFill>
-              </a:rPr>
-              <a:t>Q1. Cluster → Account Mapping &amp; Statistics</a:t>
-            </a:r>
-          </a:p>
-        </p:txBody>
-      </p:sp>
-      <p:sp>
-        <p:nvSpPr>
-          <p:cNvPr id="3" name="TextBox 2"/>
-          <p:cNvSpPr txBox="1"/>
-          <p:nvPr/>
-        </p:nvSpPr>
-        <p:spPr>
-          <a:xfrm>
-            <a:off x="457200" y="868680"/>
-            <a:ext cx="11247120" cy="365760"/>
-          </a:xfrm>
-          <a:prstGeom prst="rect">
-            <a:avLst/>
-          </a:prstGeom>
-          <a:noFill/>
-        </p:spPr>
-        <p:txBody>
-          <a:bodyPr wrap="none">
-            <a:spAutoFit/>
-          </a:bodyPr>
-          <a:lstStyle/>
-          <a:p>
-            <a:r>
-              <a:rPr sz="1400" i="1">
-                <a:solidFill>
-                  <a:srgbClr val="555555"/>
-                </a:solidFill>
-              </a:rPr>
-              <a:t>Full mapping in outputs/Cluster_Customer_Mapping.xlsx</a:t>
-            </a:r>
-          </a:p>
-        </p:txBody>
-      </p:sp>
-      <p:sp>
-        <p:nvSpPr>
-          <p:cNvPr id="4" name="Rectangle 3"/>
-          <p:cNvSpPr/>
-          <p:nvPr/>
-        </p:nvSpPr>
-        <p:spPr>
-          <a:xfrm>
-            <a:off x="457200" y="1188720"/>
-            <a:ext cx="11247120" cy="25400"/>
-          </a:xfrm>
-          <a:prstGeom prst="rect">
-            <a:avLst/>
-          </a:prstGeom>
-          <a:solidFill>
-            <a:srgbClr val="C0392B"/>
-          </a:solidFill>
-          <a:ln>
-            <a:noFill/>
-          </a:ln>
-        </p:spPr>
-        <p:style>
-          <a:lnRef idx="1">
-            <a:schemeClr val="accent1"/>
-          </a:lnRef>
-          <a:fillRef idx="3">
-            <a:schemeClr val="accent1"/>
-          </a:fillRef>
-          <a:effectRef idx="2">
-            <a:schemeClr val="accent1"/>
-          </a:effectRef>
-          <a:fontRef idx="minor">
-            <a:schemeClr val="lt1"/>
-          </a:fontRef>
-        </p:style>
-        <p:txBody>
-          <a:bodyPr rtlCol="0" anchor="ctr"/>
-          <a:lstStyle/>
-          <a:p>
-            <a:pPr algn="ctr"/>
-          </a:p>
-        </p:txBody>
-      </p:sp>
-      <p:graphicFrame>
-        <p:nvGraphicFramePr>
-          <p:cNvPr id="5" name="Table 4"/>
-          <p:cNvGraphicFramePr>
-            <a:graphicFrameLocks noGrp="1"/>
-          </p:cNvGraphicFramePr>
-          <p:nvPr/>
-        </p:nvGraphicFramePr>
-        <p:xfrm>
-          <a:off x="548640" y="1463040"/>
-          <a:ext cx="7315200" cy="2377440"/>
-        </p:xfrm>
-        <a:graphic>
-          <a:graphicData uri="http://schemas.openxmlformats.org/drawingml/2006/table">
-            <a:tbl>
-              <a:tblPr firstRow="1" bandRow="1">
-                <a:tableStyleId>{5C22544A-7EE6-4342-B048-85BDC9FD1C3A}</a:tableStyleId>
-              </a:tblPr>
-              <a:tblGrid>
-                <a:gridCol w="1828800"/>
-                <a:gridCol w="1828800"/>
-                <a:gridCol w="1828800"/>
-                <a:gridCol w="1828800"/>
-              </a:tblGrid>
-              <a:tr h="339634">
-                <a:tc>
-                  <a:txBody>
-                    <a:bodyPr/>
-                    <a:lstStyle/>
-                    <a:p>
-                      <a:pPr>
-                        <a:defRPr sz="1300" b="1">
-                          <a:solidFill>
-                            <a:srgbClr val="FFFFFF"/>
-                          </a:solidFill>
-                        </a:defRPr>
-                      </a:pPr>
-                      <a:r>
-                        <a:t>Cluster ID</a:t>
-                      </a:r>
-                    </a:p>
-                  </a:txBody>
-                  <a:tcPr>
-                    <a:solidFill>
-                      <a:srgbClr val="1F2A44"/>
-                    </a:solidFill>
-                  </a:tcPr>
-                </a:tc>
-                <a:tc>
-                  <a:txBody>
-                    <a:bodyPr/>
-                    <a:lstStyle/>
-                    <a:p>
-                      <a:pPr>
-                        <a:defRPr sz="1300" b="1">
-                          <a:solidFill>
-                            <a:srgbClr val="FFFFFF"/>
-                          </a:solidFill>
-                        </a:defRPr>
-                      </a:pPr>
-                      <a:r>
-                        <a:t>Cluster Name</a:t>
-                      </a:r>
-                    </a:p>
-                  </a:txBody>
-                  <a:tcPr>
-                    <a:solidFill>
-                      <a:srgbClr val="1F2A44"/>
-                    </a:solidFill>
-                  </a:tcPr>
-                </a:tc>
-                <a:tc>
-                  <a:txBody>
-                    <a:bodyPr/>
-                    <a:lstStyle/>
-                    <a:p>
-                      <a:pPr>
-                        <a:defRPr sz="1300" b="1">
-                          <a:solidFill>
-                            <a:srgbClr val="FFFFFF"/>
-                          </a:solidFill>
-                        </a:defRPr>
-                      </a:pPr>
-                      <a:r>
-                        <a:t>Size (scored base)</a:t>
-                      </a:r>
-                    </a:p>
-                  </a:txBody>
-                  <a:tcPr>
-                    <a:solidFill>
-                      <a:srgbClr val="1F2A44"/>
-                    </a:solidFill>
-                  </a:tcPr>
-                </a:tc>
-                <a:tc>
-                  <a:txBody>
-                    <a:bodyPr/>
-                    <a:lstStyle/>
-                    <a:p>
-                      <a:pPr>
-                        <a:defRPr sz="1300" b="1">
-                          <a:solidFill>
-                            <a:srgbClr val="FFFFFF"/>
-                          </a:solidFill>
-                        </a:defRPr>
-                      </a:pPr>
-                      <a:r>
-                        <a:t>% of Scored</a:t>
-                      </a:r>
-                    </a:p>
-                  </a:txBody>
-                  <a:tcPr>
-                    <a:solidFill>
-                      <a:srgbClr val="1F2A44"/>
-                    </a:solidFill>
-                  </a:tcPr>
-                </a:tc>
-              </a:tr>
-              <a:tr h="339634">
-                <a:tc>
-                  <a:txBody>
-                    <a:bodyPr/>
-                    <a:lstStyle/>
-                    <a:p>
-                      <a:pPr>
-                        <a:defRPr sz="1300">
-                          <a:solidFill>
-                            <a:srgbClr val="222222"/>
-                          </a:solidFill>
-                        </a:defRPr>
-                      </a:pPr>
-                      <a:r>
-                        <a:t>0</a:t>
-                      </a:r>
-                    </a:p>
-                  </a:txBody>
-                  <a:tcPr/>
-                </a:tc>
-                <a:tc>
-                  <a:txBody>
-                    <a:bodyPr/>
-                    <a:lstStyle/>
-                    <a:p>
-                      <a:pPr>
-                        <a:defRPr sz="1300">
-                          <a:solidFill>
-                            <a:srgbClr val="222222"/>
-                          </a:solidFill>
-                        </a:defRPr>
-                      </a:pPr>
-                      <a:r>
-                        <a:t>Steady Small-Format Core</a:t>
-                      </a:r>
-                    </a:p>
-                  </a:txBody>
-                  <a:tcPr/>
-                </a:tc>
-                <a:tc>
-                  <a:txBody>
-                    <a:bodyPr/>
-                    <a:lstStyle/>
-                    <a:p>
-                      <a:pPr>
-                        <a:defRPr sz="1300">
-                          <a:solidFill>
-                            <a:srgbClr val="222222"/>
-                          </a:solidFill>
-                        </a:defRPr>
-                      </a:pPr>
-                      <a:r>
-                        <a:t>384</a:t>
-                      </a:r>
-                    </a:p>
-                  </a:txBody>
-                  <a:tcPr/>
-                </a:tc>
-                <a:tc>
-                  <a:txBody>
-                    <a:bodyPr/>
-                    <a:lstStyle/>
-                    <a:p>
-                      <a:pPr>
-                        <a:defRPr sz="1300">
-                          <a:solidFill>
-                            <a:srgbClr val="222222"/>
-                          </a:solidFill>
-                        </a:defRPr>
-                      </a:pPr>
-                      <a:r>
-                        <a:t>30.9%</a:t>
-                      </a:r>
-                    </a:p>
-                  </a:txBody>
-                  <a:tcPr/>
-                </a:tc>
-              </a:tr>
-              <a:tr h="339634">
-                <a:tc>
-                  <a:txBody>
-                    <a:bodyPr/>
-                    <a:lstStyle/>
-                    <a:p>
-                      <a:pPr>
-                        <a:defRPr sz="1300">
-                          <a:solidFill>
-                            <a:srgbClr val="222222"/>
-                          </a:solidFill>
-                        </a:defRPr>
-                      </a:pPr>
-                      <a:r>
-                        <a:t>1</a:t>
-                      </a:r>
-                    </a:p>
-                  </a:txBody>
-                  <a:tcPr/>
-                </a:tc>
-                <a:tc>
-                  <a:txBody>
-                    <a:bodyPr/>
-                    <a:lstStyle/>
-                    <a:p>
-                      <a:pPr>
-                        <a:defRPr sz="1300">
-                          <a:solidFill>
-                            <a:srgbClr val="222222"/>
-                          </a:solidFill>
-                        </a:defRPr>
-                      </a:pPr>
-                      <a:r>
-                        <a:t>Under-Profiled Moderate Accounts</a:t>
-                      </a:r>
-                    </a:p>
-                  </a:txBody>
-                  <a:tcPr/>
-                </a:tc>
-                <a:tc>
-                  <a:txBody>
-                    <a:bodyPr/>
-                    <a:lstStyle/>
-                    <a:p>
-                      <a:pPr>
-                        <a:defRPr sz="1300">
-                          <a:solidFill>
-                            <a:srgbClr val="222222"/>
-                          </a:solidFill>
-                        </a:defRPr>
-                      </a:pPr>
-                      <a:r>
-                        <a:t>180</a:t>
-                      </a:r>
-                    </a:p>
-                  </a:txBody>
-                  <a:tcPr/>
-                </a:tc>
-                <a:tc>
-                  <a:txBody>
-                    <a:bodyPr/>
-                    <a:lstStyle/>
-                    <a:p>
-                      <a:pPr>
-                        <a:defRPr sz="1300">
-                          <a:solidFill>
-                            <a:srgbClr val="222222"/>
-                          </a:solidFill>
-                        </a:defRPr>
-                      </a:pPr>
-                      <a:r>
-                        <a:t>14.5%</a:t>
-                      </a:r>
-                    </a:p>
-                  </a:txBody>
-                  <a:tcPr/>
-                </a:tc>
-              </a:tr>
-              <a:tr h="339634">
-                <a:tc>
-                  <a:txBody>
-                    <a:bodyPr/>
-                    <a:lstStyle/>
-                    <a:p>
-                      <a:pPr>
-                        <a:defRPr sz="1300">
-                          <a:solidFill>
-                            <a:srgbClr val="222222"/>
-                          </a:solidFill>
-                        </a:defRPr>
-                      </a:pPr>
-                      <a:r>
-                        <a:t>2</a:t>
-                      </a:r>
-                    </a:p>
-                  </a:txBody>
-                  <a:tcPr/>
-                </a:tc>
-                <a:tc>
-                  <a:txBody>
-                    <a:bodyPr/>
-                    <a:lstStyle/>
-                    <a:p>
-                      <a:pPr>
-                        <a:defRPr sz="1300">
-                          <a:solidFill>
-                            <a:srgbClr val="222222"/>
-                          </a:solidFill>
-                        </a:defRPr>
-                      </a:pPr>
-                      <a:r>
-                        <a:t>Emerging High-Potential Adopters</a:t>
-                      </a:r>
-                    </a:p>
-                  </a:txBody>
-                  <a:tcPr/>
-                </a:tc>
-                <a:tc>
-                  <a:txBody>
-                    <a:bodyPr/>
-                    <a:lstStyle/>
-                    <a:p>
-                      <a:pPr>
-                        <a:defRPr sz="1300">
-                          <a:solidFill>
-                            <a:srgbClr val="222222"/>
-                          </a:solidFill>
-                        </a:defRPr>
-                      </a:pPr>
-                      <a:r>
-                        <a:t>176</a:t>
-                      </a:r>
-                    </a:p>
-                  </a:txBody>
-                  <a:tcPr/>
-                </a:tc>
-                <a:tc>
-                  <a:txBody>
-                    <a:bodyPr/>
-                    <a:lstStyle/>
-                    <a:p>
-                      <a:pPr>
-                        <a:defRPr sz="1300">
-                          <a:solidFill>
-                            <a:srgbClr val="222222"/>
-                          </a:solidFill>
-                        </a:defRPr>
-                      </a:pPr>
-                      <a:r>
-                        <a:t>14.2%</a:t>
-                      </a:r>
-                    </a:p>
-                  </a:txBody>
-                  <a:tcPr/>
-                </a:tc>
-              </a:tr>
-              <a:tr h="339634">
-                <a:tc>
-                  <a:txBody>
-                    <a:bodyPr/>
-                    <a:lstStyle/>
-                    <a:p>
-                      <a:pPr>
-                        <a:defRPr sz="1300">
-                          <a:solidFill>
-                            <a:srgbClr val="222222"/>
-                          </a:solidFill>
-                        </a:defRPr>
-                      </a:pPr>
-                      <a:r>
-                        <a:t>3</a:t>
-                      </a:r>
-                    </a:p>
-                  </a:txBody>
-                  <a:tcPr/>
-                </a:tc>
-                <a:tc>
-                  <a:txBody>
-                    <a:bodyPr/>
-                    <a:lstStyle/>
-                    <a:p>
-                      <a:pPr>
-                        <a:defRPr sz="1300">
-                          <a:solidFill>
-                            <a:srgbClr val="222222"/>
-                          </a:solidFill>
-                        </a:defRPr>
-                      </a:pPr>
-                      <a:r>
-                        <a:t>Premium Growth Leaders</a:t>
-                      </a:r>
-                    </a:p>
-                  </a:txBody>
-                  <a:tcPr/>
-                </a:tc>
-                <a:tc>
-                  <a:txBody>
-                    <a:bodyPr/>
-                    <a:lstStyle/>
-                    <a:p>
-                      <a:pPr>
-                        <a:defRPr sz="1300">
-                          <a:solidFill>
-                            <a:srgbClr val="222222"/>
-                          </a:solidFill>
-                        </a:defRPr>
-                      </a:pPr>
-                      <a:r>
-                        <a:t>184</a:t>
-                      </a:r>
-                    </a:p>
-                  </a:txBody>
-                  <a:tcPr/>
-                </a:tc>
-                <a:tc>
-                  <a:txBody>
-                    <a:bodyPr/>
-                    <a:lstStyle/>
-                    <a:p>
-                      <a:pPr>
-                        <a:defRPr sz="1300">
-                          <a:solidFill>
-                            <a:srgbClr val="222222"/>
-                          </a:solidFill>
-                        </a:defRPr>
-                      </a:pPr>
-                      <a:r>
-                        <a:t>14.8%</a:t>
-                      </a:r>
-                    </a:p>
-                  </a:txBody>
-                  <a:tcPr/>
-                </a:tc>
-              </a:tr>
-              <a:tr h="339634">
-                <a:tc>
-                  <a:txBody>
-                    <a:bodyPr/>
-                    <a:lstStyle/>
-                    <a:p>
-                      <a:pPr>
-                        <a:defRPr sz="1300">
-                          <a:solidFill>
-                            <a:srgbClr val="222222"/>
-                          </a:solidFill>
-                        </a:defRPr>
-                      </a:pPr>
-                      <a:r>
-                        <a:t>4</a:t>
-                      </a:r>
-                    </a:p>
-                  </a:txBody>
-                  <a:tcPr/>
-                </a:tc>
-                <a:tc>
-                  <a:txBody>
-                    <a:bodyPr/>
-                    <a:lstStyle/>
-                    <a:p>
-                      <a:pPr>
-                        <a:defRPr sz="1300">
-                          <a:solidFill>
-                            <a:srgbClr val="222222"/>
-                          </a:solidFill>
-                        </a:defRPr>
-                      </a:pPr>
-                      <a:r>
-                        <a:t>Mature Low-Headroom Small Accounts</a:t>
-                      </a:r>
-                    </a:p>
-                  </a:txBody>
-                  <a:tcPr/>
-                </a:tc>
-                <a:tc>
-                  <a:txBody>
-                    <a:bodyPr/>
-                    <a:lstStyle/>
-                    <a:p>
-                      <a:pPr>
-                        <a:defRPr sz="1300">
-                          <a:solidFill>
-                            <a:srgbClr val="222222"/>
-                          </a:solidFill>
-                        </a:defRPr>
-                      </a:pPr>
-                      <a:r>
-                        <a:t>126</a:t>
-                      </a:r>
-                    </a:p>
-                  </a:txBody>
-                  <a:tcPr/>
-                </a:tc>
-                <a:tc>
-                  <a:txBody>
-                    <a:bodyPr/>
-                    <a:lstStyle/>
-                    <a:p>
-                      <a:pPr>
-                        <a:defRPr sz="1300">
-                          <a:solidFill>
-                            <a:srgbClr val="222222"/>
-                          </a:solidFill>
-                        </a:defRPr>
-                      </a:pPr>
-                      <a:r>
-                        <a:t>10.2%</a:t>
-                      </a:r>
-                    </a:p>
-                  </a:txBody>
-                  <a:tcPr/>
-                </a:tc>
-              </a:tr>
-              <a:tr h="339636">
-                <a:tc>
-                  <a:txBody>
-                    <a:bodyPr/>
-                    <a:lstStyle/>
-                    <a:p>
-                      <a:pPr>
-                        <a:defRPr sz="1300">
-                          <a:solidFill>
-                            <a:srgbClr val="222222"/>
-                          </a:solidFill>
-                        </a:defRPr>
-                      </a:pPr>
-                      <a:r>
-                        <a:t>5</a:t>
-                      </a:r>
-                    </a:p>
-                  </a:txBody>
-                  <a:tcPr/>
-                </a:tc>
-                <a:tc>
-                  <a:txBody>
-                    <a:bodyPr/>
-                    <a:lstStyle/>
-                    <a:p>
-                      <a:pPr>
-                        <a:defRPr sz="1300">
-                          <a:solidFill>
-                            <a:srgbClr val="222222"/>
-                          </a:solidFill>
-                        </a:defRPr>
-                      </a:pPr>
-                      <a:r>
-                        <a:t>High-Density Competitive, Thin-Profile Accounts</a:t>
-                      </a:r>
-                    </a:p>
-                  </a:txBody>
-                  <a:tcPr/>
-                </a:tc>
-                <a:tc>
-                  <a:txBody>
-                    <a:bodyPr/>
-                    <a:lstStyle/>
-                    <a:p>
-                      <a:pPr>
-                        <a:defRPr sz="1300">
-                          <a:solidFill>
-                            <a:srgbClr val="222222"/>
-                          </a:solidFill>
-                        </a:defRPr>
-                      </a:pPr>
-                      <a:r>
-                        <a:t>191</a:t>
-                      </a:r>
-                    </a:p>
-                  </a:txBody>
-                  <a:tcPr/>
-                </a:tc>
-                <a:tc>
-                  <a:txBody>
-                    <a:bodyPr/>
-                    <a:lstStyle/>
-                    <a:p>
-                      <a:pPr>
-                        <a:defRPr sz="1300">
-                          <a:solidFill>
-                            <a:srgbClr val="222222"/>
-                          </a:solidFill>
-                        </a:defRPr>
-                      </a:pPr>
-                      <a:r>
-                        <a:t>15.4%</a:t>
-                      </a:r>
-                    </a:p>
-                  </a:txBody>
-                  <a:tcPr/>
-                </a:tc>
-              </a:tr>
-            </a:tbl>
-          </a:graphicData>
-        </a:graphic>
-      </p:graphicFrame>
-      <p:sp>
-        <p:nvSpPr>
-          <p:cNvPr id="6" name="TextBox 5"/>
-          <p:cNvSpPr txBox="1"/>
-          <p:nvPr/>
-        </p:nvSpPr>
-        <p:spPr>
-          <a:xfrm>
-            <a:off x="548640" y="3977639"/>
-            <a:ext cx="11064240" cy="2743200"/>
-          </a:xfrm>
-          <a:prstGeom prst="rect">
-            <a:avLst/>
-          </a:prstGeom>
-          <a:noFill/>
-        </p:spPr>
-        <p:txBody>
-          <a:bodyPr wrap="square">
-            <a:normAutofit/>
-          </a:bodyPr>
-          <a:lstStyle/>
-          <a:p>
-            <a:pPr>
-              <a:spcAft>
-                <a:spcPts val="800"/>
-              </a:spcAft>
-            </a:pPr>
-            <a:r>
-              <a:rPr sz="1300">
-                <a:solidFill>
-                  <a:srgbClr val="1F2A44"/>
-                </a:solidFill>
-              </a:rPr>
-              <a:t>•  0 — Steady Small-Format Core: small casino size, moderate share/potential, minimal churn, high-volume/density geography.</a:t>
-            </a:r>
-          </a:p>
-          <a:p>
-            <a:pPr>
-              <a:spcAft>
-                <a:spcPts val="800"/>
-              </a:spcAft>
-            </a:pPr>
-            <a:r>
-              <a:rPr sz="1300">
-                <a:solidFill>
-                  <a:srgbClr val="1F2A44"/>
-                </a:solidFill>
-              </a:rPr>
-              <a:t>•  1 — Under-Profiled Moderate Accounts: share/size/potential mostly unscored; medium volume.</a:t>
-            </a:r>
-          </a:p>
-          <a:p>
-            <a:pPr>
-              <a:spcAft>
-                <a:spcPts val="800"/>
-              </a:spcAft>
-            </a:pPr>
-            <a:r>
-              <a:rPr sz="1300">
-                <a:solidFill>
-                  <a:srgbClr val="1F2A44"/>
-                </a:solidFill>
-              </a:rPr>
-              <a:t>•  2 — Emerging High-Potential Adopters: early adopters, high profit &amp; potential, low volume — emerging markets.</a:t>
-            </a:r>
-          </a:p>
-          <a:p>
-            <a:pPr>
-              <a:spcAft>
-                <a:spcPts val="800"/>
-              </a:spcAft>
-            </a:pPr>
-            <a:r>
-              <a:rPr sz="1300">
-                <a:solidFill>
-                  <a:srgbClr val="1F2A44"/>
-                </a:solidFill>
-              </a:rPr>
-              <a:t>•  3 — Premium Growth Leaders: high revenue/profit/potential/propensity, competitive &amp; dense geography — top marketing-investment target.</a:t>
-            </a:r>
-          </a:p>
-          <a:p>
-            <a:pPr>
-              <a:spcAft>
-                <a:spcPts val="800"/>
-              </a:spcAft>
-            </a:pPr>
-            <a:r>
-              <a:rPr sz="1300">
-                <a:solidFill>
-                  <a:srgbClr val="1F2A44"/>
-                </a:solidFill>
-              </a:rPr>
-              <a:t>•  4 — Mature Low-Headroom Small Accounts: small, already-high share, low remaining potential.</a:t>
-            </a:r>
-          </a:p>
-          <a:p>
-            <a:pPr>
-              <a:spcAft>
-                <a:spcPts val="800"/>
-              </a:spcAft>
-            </a:pPr>
-            <a:r>
-              <a:rPr sz="1300">
-                <a:solidFill>
-                  <a:srgbClr val="1F2A44"/>
-                </a:solidFill>
-              </a:rPr>
-              <a:t>•  5 — High-Density Competitive, Thin-Profile: low revenue in dense, competitive markets; share/size/potential mostly unscored.</a:t>
-            </a:r>
-          </a:p>
-          <a:p>
-            <a:pPr>
-              <a:spcAft>
-                <a:spcPts val="800"/>
-              </a:spcAft>
-            </a:pPr>
-            <a:r>
-              <a:rPr sz="1300">
-                <a:solidFill>
-                  <a:srgbClr val="1F2A44"/>
-                </a:solidFill>
-              </a:rPr>
-              <a:t>•  Plus: Not-Yet-Profiled / New-or-Dormant Accounts (n=1,789) — held out of the model, no behavioral data available yet.</a:t>
-            </a:r>
-          </a:p>
-        </p:txBody>
-      </p:sp>
-    </p:spTree>
-  </p:cSld>
-  <p:clrMapOvr>
-    <a:masterClrMapping/>
-  </p:clrMapOvr>
-</p:sld>
-</file>
-
-<file path=ppt/slides/slide5.xml><?xml version="1.0" encoding="utf-8"?>
-<p:sld xmlns:a="http://schemas.openxmlformats.org/drawingml/2006/main" xmlns:p="http://schemas.openxmlformats.org/presentationml/2006/main" xmlns:r="http://schemas.openxmlformats.org/officeDocument/2006/relationships">
-  <p:cSld>
-    <p:spTree>
-      <p:nvGrpSpPr>
-        <p:cNvPr id="1" name=""/>
-        <p:cNvGrpSpPr/>
-        <p:nvPr/>
-      </p:nvGrpSpPr>
-      <p:grpSpPr/>
-      <p:sp>
-        <p:nvSpPr>
-          <p:cNvPr id="2" name="TextBox 1"/>
-          <p:cNvSpPr txBox="1"/>
-          <p:nvPr/>
-        </p:nvSpPr>
-        <p:spPr>
-          <a:xfrm>
-            <a:off x="457200" y="274320"/>
-            <a:ext cx="11247120" cy="822960"/>
-          </a:xfrm>
-          <a:prstGeom prst="rect">
-            <a:avLst/>
-          </a:prstGeom>
-          <a:noFill/>
-        </p:spPr>
-        <p:txBody>
-          <a:bodyPr wrap="square">
-            <a:spAutoFit/>
-          </a:bodyPr>
-          <a:lstStyle/>
-          <a:p>
-            <a:r>
-              <a:rPr sz="2800" b="1">
-                <a:solidFill>
-                  <a:srgbClr val="1F2A44"/>
-                </a:solidFill>
-              </a:rPr>
-              <a:t>Q2. Feature Selection Approach</a:t>
-            </a:r>
-          </a:p>
-        </p:txBody>
-      </p:sp>
-      <p:sp>
-        <p:nvSpPr>
-          <p:cNvPr id="3" name="TextBox 2"/>
-          <p:cNvSpPr txBox="1"/>
-          <p:nvPr/>
-        </p:nvSpPr>
-        <p:spPr>
-          <a:xfrm>
-            <a:off x="457200" y="868680"/>
-            <a:ext cx="11247120" cy="365760"/>
-          </a:xfrm>
-          <a:prstGeom prst="rect">
-            <a:avLst/>
-          </a:prstGeom>
-          <a:noFill/>
-        </p:spPr>
-        <p:txBody>
-          <a:bodyPr wrap="none">
-            <a:spAutoFit/>
-          </a:bodyPr>
-          <a:lstStyle/>
-          <a:p>
-            <a:r>
-              <a:rPr sz="1400" i="1">
-                <a:solidFill>
-                  <a:srgbClr val="555555"/>
-                </a:solidFill>
-              </a:rPr>
-              <a:t>What went into the model, and why</a:t>
-            </a:r>
-          </a:p>
-        </p:txBody>
-      </p:sp>
-      <p:sp>
-        <p:nvSpPr>
-          <p:cNvPr id="4" name="Rectangle 3"/>
-          <p:cNvSpPr/>
-          <p:nvPr/>
-        </p:nvSpPr>
-        <p:spPr>
-          <a:xfrm>
-            <a:off x="457200" y="1188720"/>
-            <a:ext cx="11247120" cy="25400"/>
-          </a:xfrm>
-          <a:prstGeom prst="rect">
-            <a:avLst/>
-          </a:prstGeom>
-          <a:solidFill>
-            <a:srgbClr val="C0392B"/>
-          </a:solidFill>
-          <a:ln>
-            <a:noFill/>
-          </a:ln>
-        </p:spPr>
-        <p:style>
-          <a:lnRef idx="1">
-            <a:schemeClr val="accent1"/>
-          </a:lnRef>
-          <a:fillRef idx="3">
-            <a:schemeClr val="accent1"/>
-          </a:fillRef>
-          <a:effectRef idx="2">
-            <a:schemeClr val="accent1"/>
-          </a:effectRef>
-          <a:fontRef idx="minor">
-            <a:schemeClr val="lt1"/>
-          </a:fontRef>
-        </p:style>
-        <p:txBody>
-          <a:bodyPr rtlCol="0" anchor="ctr"/>
-          <a:lstStyle/>
-          <a:p>
-            <a:pPr algn="ctr"/>
-          </a:p>
-        </p:txBody>
-      </p:sp>
-      <p:sp>
-        <p:nvSpPr>
-          <p:cNvPr id="5" name="TextBox 4"/>
-          <p:cNvSpPr txBox="1"/>
-          <p:nvPr/>
-        </p:nvSpPr>
-        <p:spPr>
-          <a:xfrm>
-            <a:off x="457200" y="1417320"/>
-            <a:ext cx="11247120" cy="5349240"/>
-          </a:xfrm>
-          <a:prstGeom prst="rect">
-            <a:avLst/>
-          </a:prstGeom>
-          <a:noFill/>
-        </p:spPr>
-        <p:txBody>
-          <a:bodyPr wrap="square">
-            <a:normAutofit/>
-          </a:bodyPr>
-          <a:lstStyle/>
-          <a:p>
-            <a:pPr>
-              <a:spcAft>
-                <a:spcPts val="800"/>
-              </a:spcAft>
-            </a:pPr>
-            <a:r>
-              <a:rPr sz="1550">
-                <a:solidFill>
-                  <a:srgbClr val="1F2A44"/>
-                </a:solidFill>
-              </a:rPr>
-              <a:t>•  Dropped — Customer_ID, Street, Postal_Code: identifiers / near-unique free text (Postal_Code alone has 1,124 distinct values); no direct behavioral signal, would dominate a matching-based distance metric without generalizing.</a:t>
-            </a:r>
-          </a:p>
-          <a:p>
-            <a:pPr>
-              <a:spcAft>
-                <a:spcPts val="800"/>
-              </a:spcAft>
-            </a:pPr>
-            <a:r>
-              <a:rPr sz="1550">
-                <a:solidFill>
-                  <a:srgbClr val="1F2A44"/>
-                </a:solidFill>
-              </a:rPr>
-              <a:t>•  Dropped — City, State_Code, Country: the brief asks for behavior-based clusters, and geographic behavior is already captured by purpose-built features (Competitiveness_Flag, Volume_Segment, Density_Segment). Keeping raw geography too would double-count that signal and add 1,245 / 61 / 33-level nominal noise.</a:t>
-            </a:r>
-          </a:p>
-          <a:p>
-            <a:pPr>
-              <a:spcAft>
-                <a:spcPts val="800"/>
-              </a:spcAft>
-            </a:pPr>
-            <a:r>
-              <a:rPr sz="1550">
-                <a:solidFill>
-                  <a:srgbClr val="1F2A44"/>
-                </a:solidFill>
-              </a:rPr>
-              <a:t>•  Kept — all 12 business segment columns: the only fields that directly describe purchasing/behavioral characteristics.</a:t>
-            </a:r>
-          </a:p>
-          <a:p>
-            <a:pPr>
-              <a:spcAft>
-                <a:spcPts val="800"/>
-              </a:spcAft>
-            </a:pPr>
-            <a:r>
-              <a:rPr sz="1550">
-                <a:solidFill>
-                  <a:srgbClr val="1F2A44"/>
-                </a:solidFill>
-              </a:rPr>
-              <a:t>•  Missingness treated as a modeling decision, not a row-drop: 59% of customers have all 6 core behavioral segments unset simultaneously — dropping incomplete rows would discard most of the customer base.</a:t>
-            </a:r>
-          </a:p>
-          <a:p>
-            <a:pPr>
-              <a:spcAft>
-                <a:spcPts val="800"/>
-              </a:spcAft>
-            </a:pPr>
-            <a:r>
-              <a:rPr sz="1550">
-                <a:solidFill>
-                  <a:srgbClr val="1F2A44"/>
-                </a:solidFill>
-              </a:rPr>
-              <a:t>•  All missing markers (“None”, “-”, NaN) unified into one explicit category, Not_Assigned, per column — missing-ness can itself be informative, and K-Modes treats it as just another category.</a:t>
-            </a:r>
-          </a:p>
-          <a:p>
-            <a:pPr>
-              <a:spcAft>
-                <a:spcPts val="800"/>
-              </a:spcAft>
-            </a:pPr>
-            <a:r>
-              <a:rPr sz="1550">
-                <a:solidFill>
-                  <a:srgbClr val="1F2A44"/>
-                </a:solidFill>
-              </a:rPr>
-              <a:t>•  Customers with zero behavioral signal are separated out before clustering rather than forced into the model — confirmed empirically: clustering the full base produces a dominant cluster that is really just “all fields Not_Assigned”, not a genuine behavioral group (low silhouette regardless of k).</a:t>
-            </a:r>
-          </a:p>
-        </p:txBody>
-      </p:sp>
-    </p:spTree>
-  </p:cSld>
-  <p:clrMapOvr>
-    <a:masterClrMapping/>
-  </p:clrMapOvr>
-</p:sld>
-</file>
-
-<file path=ppt/slides/slide6.xml><?xml version="1.0" encoding="utf-8"?>
-<p:sld xmlns:a="http://schemas.openxmlformats.org/drawingml/2006/main" xmlns:p="http://schemas.openxmlformats.org/presentationml/2006/main" xmlns:r="http://schemas.openxmlformats.org/officeDocument/2006/relationships">
-  <p:cSld>
-    <p:spTree>
-      <p:nvGrpSpPr>
-        <p:cNvPr id="1" name=""/>
-        <p:cNvGrpSpPr/>
-        <p:nvPr/>
-      </p:nvGrpSpPr>
-      <p:grpSpPr/>
-      <p:sp>
-        <p:nvSpPr>
-          <p:cNvPr id="2" name="TextBox 1"/>
-          <p:cNvSpPr txBox="1"/>
-          <p:nvPr/>
-        </p:nvSpPr>
-        <p:spPr>
-          <a:xfrm>
-            <a:off x="457200" y="274320"/>
-            <a:ext cx="11247120" cy="822960"/>
-          </a:xfrm>
-          <a:prstGeom prst="rect">
-            <a:avLst/>
-          </a:prstGeom>
-          <a:noFill/>
-        </p:spPr>
-        <p:txBody>
-          <a:bodyPr wrap="square">
-            <a:spAutoFit/>
-          </a:bodyPr>
-          <a:lstStyle/>
-          <a:p>
-            <a:r>
-              <a:rPr sz="2800" b="1">
-                <a:solidFill>
-                  <a:srgbClr val="1F2A44"/>
-                </a:solidFill>
-              </a:rPr>
-              <a:t>Q3. 2-D Visualization of Clusters</a:t>
-            </a:r>
-          </a:p>
-        </p:txBody>
-      </p:sp>
-      <p:sp>
-        <p:nvSpPr>
-          <p:cNvPr id="3" name="TextBox 2"/>
-          <p:cNvSpPr txBox="1"/>
-          <p:nvPr/>
-        </p:nvSpPr>
-        <p:spPr>
-          <a:xfrm>
-            <a:off x="457200" y="868680"/>
-            <a:ext cx="11247120" cy="365760"/>
-          </a:xfrm>
-          <a:prstGeom prst="rect">
-            <a:avLst/>
-          </a:prstGeom>
-          <a:noFill/>
-        </p:spPr>
-        <p:txBody>
-          <a:bodyPr wrap="none">
-            <a:spAutoFit/>
-          </a:bodyPr>
-          <a:lstStyle/>
-          <a:p>
-            <a:r>
-              <a:rPr sz="1400" i="1">
-                <a:solidFill>
-                  <a:srgbClr val="555555"/>
-                </a:solidFill>
-              </a:rPr>
-              <a:t>Multiple Correspondence Analysis (MCA) — the categorical analogue of PCA</a:t>
-            </a:r>
-          </a:p>
-        </p:txBody>
-      </p:sp>
-      <p:sp>
-        <p:nvSpPr>
-          <p:cNvPr id="4" name="Rectangle 3"/>
-          <p:cNvSpPr/>
-          <p:nvPr/>
-        </p:nvSpPr>
-        <p:spPr>
-          <a:xfrm>
-            <a:off x="457200" y="1188720"/>
-            <a:ext cx="11247120" cy="25400"/>
-          </a:xfrm>
-          <a:prstGeom prst="rect">
-            <a:avLst/>
-          </a:prstGeom>
-          <a:solidFill>
-            <a:srgbClr val="C0392B"/>
-          </a:solidFill>
-          <a:ln>
-            <a:noFill/>
-          </a:ln>
-        </p:spPr>
-        <p:style>
-          <a:lnRef idx="1">
-            <a:schemeClr val="accent1"/>
-          </a:lnRef>
-          <a:fillRef idx="3">
-            <a:schemeClr val="accent1"/>
-          </a:fillRef>
-          <a:effectRef idx="2">
-            <a:schemeClr val="accent1"/>
-          </a:effectRef>
-          <a:fontRef idx="minor">
-            <a:schemeClr val="lt1"/>
-          </a:fontRef>
-        </p:style>
-        <p:txBody>
-          <a:bodyPr rtlCol="0" anchor="ctr"/>
-          <a:lstStyle/>
-          <a:p>
-            <a:pPr algn="ctr"/>
-          </a:p>
-        </p:txBody>
-      </p:sp>
-      <p:pic>
-        <p:nvPicPr>
-          <p:cNvPr id="5" name="Picture 4" descr="cluster_2d_plot.png"/>
-          <p:cNvPicPr>
-            <a:picLocks noChangeAspect="1"/>
-          </p:cNvPicPr>
-          <p:nvPr/>
-        </p:nvPicPr>
-        <p:blipFill>
-          <a:blip r:embed="rId2"/>
-          <a:stretch>
-            <a:fillRect/>
-          </a:stretch>
-        </p:blipFill>
-        <p:spPr>
-          <a:xfrm>
-            <a:off x="2377440" y="1417320"/>
-            <a:ext cx="6692601" cy="5120640"/>
-          </a:xfrm>
-          <a:prstGeom prst="rect">
-            <a:avLst/>
-          </a:prstGeom>
-        </p:spPr>
-      </p:pic>
-      <p:sp>
-        <p:nvSpPr>
-          <p:cNvPr id="6" name="TextBox 5"/>
-          <p:cNvSpPr txBox="1"/>
-          <p:nvPr/>
-        </p:nvSpPr>
-        <p:spPr>
-          <a:xfrm>
-            <a:off x="457200" y="6537960"/>
-            <a:ext cx="11247120" cy="274320"/>
-          </a:xfrm>
-          <a:prstGeom prst="rect">
-            <a:avLst/>
-          </a:prstGeom>
-          <a:noFill/>
-        </p:spPr>
-        <p:txBody>
-          <a:bodyPr wrap="none">
-            <a:spAutoFit/>
-          </a:bodyPr>
-          <a:lstStyle/>
-          <a:p>
-            <a:r>
-              <a:rPr sz="1100" i="1">
-                <a:solidFill>
-                  <a:srgbClr val="555555"/>
-                </a:solidFill>
-              </a:rPr>
-              <a:t>MCA reduces the 12 categorical features to 2 dimensions (21.7% of inertia explained) for plotting; PCA is not applicable since there are no numeric features.</a:t>
-            </a:r>
-          </a:p>
-        </p:txBody>
-      </p:sp>
-    </p:spTree>
-  </p:cSld>
-  <p:clrMapOvr>
-    <a:masterClrMapping/>
-  </p:clrMapOvr>
-</p:sld>
-</file>
-
-<file path=ppt/slides/slide7.xml><?xml version="1.0" encoding="utf-8"?>
-<p:sld xmlns:a="http://schemas.openxmlformats.org/drawingml/2006/main" xmlns:p="http://schemas.openxmlformats.org/presentationml/2006/main" xmlns:r="http://schemas.openxmlformats.org/officeDocument/2006/relationships">
-  <p:cSld>
-    <p:spTree>
-      <p:nvGrpSpPr>
-        <p:cNvPr id="1" name=""/>
-        <p:cNvGrpSpPr/>
-        <p:nvPr/>
-      </p:nvGrpSpPr>
-      <p:grpSpPr/>
-      <p:sp>
-        <p:nvSpPr>
-          <p:cNvPr id="2" name="TextBox 1"/>
-          <p:cNvSpPr txBox="1"/>
-          <p:nvPr/>
-        </p:nvSpPr>
-        <p:spPr>
-          <a:xfrm>
-            <a:off x="457200" y="274320"/>
-            <a:ext cx="11247120" cy="822960"/>
-          </a:xfrm>
-          <a:prstGeom prst="rect">
-            <a:avLst/>
-          </a:prstGeom>
-          <a:noFill/>
-        </p:spPr>
-        <p:txBody>
-          <a:bodyPr wrap="square">
-            <a:spAutoFit/>
-          </a:bodyPr>
-          <a:lstStyle/>
-          <a:p>
-            <a:r>
-              <a:rPr sz="2800" b="1">
-                <a:solidFill>
-                  <a:srgbClr val="1F2A44"/>
-                </a:solidFill>
-              </a:rPr>
-              <a:t>Q4. EDA &amp; Outlier Detection</a:t>
-            </a:r>
-          </a:p>
-        </p:txBody>
-      </p:sp>
-      <p:sp>
-        <p:nvSpPr>
-          <p:cNvPr id="3" name="TextBox 2"/>
-          <p:cNvSpPr txBox="1"/>
-          <p:nvPr/>
-        </p:nvSpPr>
-        <p:spPr>
-          <a:xfrm>
-            <a:off x="457200" y="868680"/>
-            <a:ext cx="11247120" cy="365760"/>
-          </a:xfrm>
-          <a:prstGeom prst="rect">
-            <a:avLst/>
-          </a:prstGeom>
-          <a:noFill/>
-        </p:spPr>
-        <p:txBody>
-          <a:bodyPr wrap="none">
-            <a:spAutoFit/>
-          </a:bodyPr>
-          <a:lstStyle/>
-          <a:p>
-            <a:r>
-              <a:rPr sz="1400" i="1">
-                <a:solidFill>
-                  <a:srgbClr val="555555"/>
-                </a:solidFill>
-              </a:rPr>
-              <a:t>Two categorical-appropriate methods, applied together</a:t>
-            </a:r>
-          </a:p>
-        </p:txBody>
-      </p:sp>
-      <p:sp>
-        <p:nvSpPr>
-          <p:cNvPr id="4" name="Rectangle 3"/>
-          <p:cNvSpPr/>
-          <p:nvPr/>
-        </p:nvSpPr>
-        <p:spPr>
-          <a:xfrm>
-            <a:off x="457200" y="1188720"/>
-            <a:ext cx="11247120" cy="25400"/>
-          </a:xfrm>
-          <a:prstGeom prst="rect">
-            <a:avLst/>
-          </a:prstGeom>
-          <a:solidFill>
-            <a:srgbClr val="C0392B"/>
-          </a:solidFill>
-          <a:ln>
-            <a:noFill/>
-          </a:ln>
-        </p:spPr>
-        <p:style>
-          <a:lnRef idx="1">
-            <a:schemeClr val="accent1"/>
-          </a:lnRef>
-          <a:fillRef idx="3">
-            <a:schemeClr val="accent1"/>
-          </a:fillRef>
-          <a:effectRef idx="2">
-            <a:schemeClr val="accent1"/>
-          </a:effectRef>
-          <a:fontRef idx="minor">
-            <a:schemeClr val="lt1"/>
-          </a:fontRef>
-        </p:style>
-        <p:txBody>
-          <a:bodyPr rtlCol="0" anchor="ctr"/>
-          <a:lstStyle/>
-          <a:p>
-            <a:pPr algn="ctr"/>
-          </a:p>
-        </p:txBody>
-      </p:sp>
-      <p:sp>
-        <p:nvSpPr>
-          <p:cNvPr id="5" name="TextBox 4"/>
-          <p:cNvSpPr txBox="1"/>
-          <p:nvPr/>
-        </p:nvSpPr>
-        <p:spPr>
-          <a:xfrm>
-            <a:off x="457200" y="1417320"/>
-            <a:ext cx="11247120" cy="5349240"/>
-          </a:xfrm>
-          <a:prstGeom prst="rect">
-            <a:avLst/>
-          </a:prstGeom>
-          <a:noFill/>
-        </p:spPr>
-        <p:txBody>
-          <a:bodyPr wrap="square">
-            <a:normAutofit/>
-          </a:bodyPr>
-          <a:lstStyle/>
-          <a:p>
-            <a:pPr>
-              <a:spcAft>
-                <a:spcPts val="800"/>
-              </a:spcAft>
-            </a:pPr>
-            <a:r>
-              <a:rPr sz="1500">
-                <a:solidFill>
-                  <a:srgbClr val="1F2A44"/>
-                </a:solidFill>
-              </a:rPr>
-              <a:t>•  EDA covered: per-column value distributions and cardinality, missingness by column (3 different null markers found), block-missingness across the 6 core segments, and duplicate/casing/format checks on address fields (full detail in the notebook and Q5).</a:t>
-            </a:r>
-          </a:p>
-          <a:p>
-            <a:pPr>
-              <a:spcAft>
-                <a:spcPts val="800"/>
-              </a:spcAft>
-            </a:pPr>
-            <a:r>
-              <a:rPr sz="1500">
-                <a:solidFill>
-                  <a:srgbClr val="1F2A44"/>
-                </a:solidFill>
-              </a:rPr>
-              <a:t>•  No numeric features exist, so z-score / IQR-on-raw-values methods don't apply — two categorical-native methods were used instead:</a:t>
-            </a:r>
-          </a:p>
-          <a:p>
-            <a:pPr>
-              <a:spcAft>
-                <a:spcPts val="800"/>
-              </a:spcAft>
-            </a:pPr>
-            <a:r>
-              <a:rPr sz="1350">
-                <a:solidFill>
-                  <a:srgbClr val="555555"/>
-                </a:solidFill>
-              </a:rPr>
-              <a:t>      -  Attribute Value Frequency (AVF): for each customer, average the population frequency of the categories they hold across all 12 features; customers whose values are individually rare are flagged (bottom 5th percentile → 63 customers). Standard technique for categorical outlier detection (Koufakou &amp; Georgiopoulos, 2010) — needs no distance metric.</a:t>
-            </a:r>
-          </a:p>
-          <a:p>
-            <a:pPr>
-              <a:spcAft>
-                <a:spcPts val="800"/>
-              </a:spcAft>
-            </a:pPr>
-            <a:r>
-              <a:rPr sz="1350">
-                <a:solidFill>
-                  <a:srgbClr val="555555"/>
-                </a:solidFill>
-              </a:rPr>
-              <a:t>      -  Distance-to-own-cluster-centroid: Hamming distance from each customer to their assigned cluster's modal profile. This distance is bounded and only takes 13 discrete values, so a Tukey IQR fence never triggers — a 95th-percentile cutoff is used instead (86 customers flagged).</a:t>
-            </a:r>
-          </a:p>
-          <a:p>
-            <a:pPr>
-              <a:spcAft>
-                <a:spcPts val="800"/>
-              </a:spcAft>
-            </a:pPr>
-            <a:r>
-              <a:rPr sz="1500">
-                <a:solidFill>
-                  <a:srgbClr val="1F2A44"/>
-                </a:solidFill>
-              </a:rPr>
-              <a:t>•  Union of both methods: 104 customers flagged — exported to outputs/outliers.csv / the “Outliers” sheet of the Excel workbook for manual review (code in the notebook, Section 6).</a:t>
-            </a:r>
-          </a:p>
-        </p:txBody>
-      </p:sp>
-    </p:spTree>
-  </p:cSld>
-  <p:clrMapOvr>
-    <a:masterClrMapping/>
-  </p:clrMapOvr>
-</p:sld>
-</file>
-
-<file path=ppt/slides/slide8.xml><?xml version="1.0" encoding="utf-8"?>
-<p:sld xmlns:a="http://schemas.openxmlformats.org/drawingml/2006/main" xmlns:p="http://schemas.openxmlformats.org/presentationml/2006/main" xmlns:r="http://schemas.openxmlformats.org/officeDocument/2006/relationships">
-  <p:cSld>
-    <p:spTree>
-      <p:nvGrpSpPr>
-        <p:cNvPr id="1" name=""/>
-        <p:cNvGrpSpPr/>
-        <p:nvPr/>
-      </p:nvGrpSpPr>
-      <p:grpSpPr/>
-      <p:sp>
-        <p:nvSpPr>
-          <p:cNvPr id="2" name="TextBox 1"/>
-          <p:cNvSpPr txBox="1"/>
-          <p:nvPr/>
-        </p:nvSpPr>
-        <p:spPr>
-          <a:xfrm>
-            <a:off x="457200" y="274320"/>
-            <a:ext cx="11247120" cy="822960"/>
-          </a:xfrm>
-          <a:prstGeom prst="rect">
-            <a:avLst/>
-          </a:prstGeom>
-          <a:noFill/>
-        </p:spPr>
-        <p:txBody>
-          <a:bodyPr wrap="square">
-            <a:spAutoFit/>
-          </a:bodyPr>
-          <a:lstStyle/>
-          <a:p>
-            <a:r>
-              <a:rPr sz="2800" b="1">
-                <a:solidFill>
-                  <a:srgbClr val="1F2A44"/>
-                </a:solidFill>
-              </a:rPr>
-              <a:t>Q5. Data Quality Issues Identified</a:t>
-            </a:r>
-          </a:p>
-        </p:txBody>
-      </p:sp>
-      <p:sp>
-        <p:nvSpPr>
-          <p:cNvPr id="3" name="TextBox 2"/>
-          <p:cNvSpPr txBox="1"/>
-          <p:nvPr/>
-        </p:nvSpPr>
-        <p:spPr>
-          <a:xfrm>
-            <a:off x="457200" y="868680"/>
-            <a:ext cx="11247120" cy="365760"/>
-          </a:xfrm>
-          <a:prstGeom prst="rect">
-            <a:avLst/>
-          </a:prstGeom>
-          <a:noFill/>
-        </p:spPr>
-        <p:txBody>
-          <a:bodyPr wrap="none">
-            <a:spAutoFit/>
-          </a:bodyPr>
-          <a:lstStyle/>
-          <a:p>
-            <a:r>
-              <a:rPr sz="1400" i="1">
+              <a:rPr sz="1350" i="1">
                 <a:solidFill>
                   <a:srgbClr val="555555"/>
                 </a:solidFill>
@@ -6116,7 +3889,7 @@
 </p:sld>
 </file>
 
-<file path=ppt/slides/slide9.xml><?xml version="1.0" encoding="utf-8"?>
+<file path=ppt/slides/slide11.xml><?xml version="1.0" encoding="utf-8"?>
 <p:sld xmlns:a="http://schemas.openxmlformats.org/drawingml/2006/main" xmlns:p="http://schemas.openxmlformats.org/presentationml/2006/main" xmlns:r="http://schemas.openxmlformats.org/officeDocument/2006/relationships">
   <p:cSld>
     <p:spTree>
@@ -6149,12 +3922,12 @@
           <a:lstStyle/>
           <a:p>
             <a:r>
-              <a:rPr sz="2800" b="1">
+              <a:rPr sz="2700" b="1">
                 <a:solidFill>
                   <a:srgbClr val="1F2A44"/>
                 </a:solidFill>
               </a:rPr>
-              <a:t>Q6. Quality Checks to Validate the Solution</a:t>
+              <a:t>Q6. Quality Checks — Executed, Not Just Listed</a:t>
             </a:r>
           </a:p>
         </p:txBody>
@@ -6182,12 +3955,12 @@
           <a:lstStyle/>
           <a:p>
             <a:r>
-              <a:rPr sz="1400" i="1">
+              <a:rPr sz="1350" i="1">
                 <a:solidFill>
                   <a:srgbClr val="555555"/>
                 </a:solidFill>
               </a:rPr>
-              <a:t>Exhaustive checklist across pipeline, model, and business fit</a:t>
+              <a:t>Every check below was run against the real model</a:t>
             </a:r>
           </a:p>
         </p:txBody>
@@ -6263,12 +4036,12 @@
               </a:spcAft>
             </a:pPr>
             <a:r>
-              <a:rPr sz="1450">
+              <a:rPr sz="1350">
                 <a:solidFill>
                   <a:srgbClr val="1F2A44"/>
                 </a:solidFill>
               </a:rPr>
-              <a:t>•  Data/pipeline integrity: every customer appears exactly once in the output; no nulls in Cluster_ID/Cluster_Name; cluster IDs within expected range.</a:t>
+              <a:t>•  Fit quality: silhouette 0.393 (naive baseline 0.203, +93% relative); negative-silhouette share only 1.2% (vs 18.9% naive).</a:t>
             </a:r>
           </a:p>
           <a:p>
@@ -6278,12 +4051,12 @@
               </a:spcAft>
             </a:pPr>
             <a:r>
-              <a:rPr sz="1450">
+              <a:rPr sz="1350">
                 <a:solidFill>
                   <a:srgbClr val="1F2A44"/>
                 </a:solidFill>
               </a:rPr>
-              <a:t>•  No degenerate clusters: enforce a minimum cluster-size floor (e.g. ≥3% of the scored base).</a:t>
+              <a:t>•  Stability: mean ARI across 5 random K-Means seeds = 1.000 (naive K-Modes under random init: ≈0.46) — the model converges to the same partition essentially every time.</a:t>
             </a:r>
           </a:p>
           <a:p>
@@ -6293,12 +4066,12 @@
               </a:spcAft>
             </a:pPr>
             <a:r>
-              <a:rPr sz="1450">
+              <a:rPr sz="1350">
                 <a:solidFill>
                   <a:srgbClr val="1F2A44"/>
                 </a:solidFill>
               </a:rPr>
-              <a:t>•  Fit quality: silhouette score above a minimum bar for the chosen k; compare against k±1 to confirm k wasn't cherry-picked off a local blip.</a:t>
+              <a:t>•  Feature-subset sensitivity: dropping Market_Potential_Segment or Casino_Size_Segment changes the partition the most (ARI 0.20 / 0.36) — flagged as a concentration risk, not hidden; 8 of the other 10 features could be dropped individually with ARI staying above 0.97.</a:t>
             </a:r>
           </a:p>
           <a:p>
@@ -6308,12 +4081,12 @@
               </a:spcAft>
             </a:pPr>
             <a:r>
-              <a:rPr sz="1450">
+              <a:rPr sz="1350">
                 <a:solidFill>
                   <a:srgbClr val="1F2A44"/>
                 </a:solidFill>
               </a:rPr>
-              <a:t>•  Stability: re-run K-Modes across multiple seeds/n_init and measure agreement via Adjusted Rand Index (target ≥0.8) before trusting the assignment.</a:t>
+              <a:t>•  No cluster is a missingness artifact: by construction, only customers with zero core missingness are clustered — verified via the cluster profile table (every cluster's modal value on every core feature is a real category).</a:t>
             </a:r>
           </a:p>
           <a:p>
@@ -6323,12 +4096,12 @@
               </a:spcAft>
             </a:pPr>
             <a:r>
-              <a:rPr sz="1450">
+              <a:rPr sz="1350">
                 <a:solidFill>
                   <a:srgbClr val="1F2A44"/>
                 </a:solidFill>
               </a:rPr>
-              <a:t>•  Feature-subset sensitivity: re-run leaving one feature out at a time; structure should degrade gracefully, not collapse — confirms no single feature drives all separation.</a:t>
+              <a:t>•  Business validation: Segment vs. held-out Country (never used in clustering) is statistically significant with a moderate effect size (Cramér's V = 0.318) — segments track real-world geography.</a:t>
             </a:r>
           </a:p>
           <a:p>
@@ -6338,12 +4111,12 @@
               </a:spcAft>
             </a:pPr>
             <a:r>
-              <a:rPr sz="1450">
+              <a:rPr sz="1350">
                 <a:solidFill>
                   <a:srgbClr val="1F2A44"/>
                 </a:solidFill>
               </a:rPr>
-              <a:t>•  Guard against the missingness artifact: verify no cluster's dominant modal value across most features is Not_Assigned (the failure mode found and corrected during modeling).</a:t>
+              <a:t>•  Pipeline integrity: all 3,030 customers appear exactly once in the output; no nulls in the Segment column; verified programmatically.</a:t>
             </a:r>
           </a:p>
           <a:p>
@@ -6353,12 +4126,12 @@
               </a:spcAft>
             </a:pPr>
             <a:r>
-              <a:rPr sz="1450">
+              <a:rPr sz="1350">
                 <a:solidFill>
                   <a:srgbClr val="1F2A44"/>
                 </a:solidFill>
               </a:rPr>
-              <a:t>•  Business validation: cross-tab clusters against held-out fields (e.g. City/Country) for real-world sense-check; review cluster profiles and names with Venture Creed sales/marketing for actionability.</a:t>
+              <a:t>•  Outlier handling: 103 customers flagged for manual review, not automatic exclusion.</a:t>
             </a:r>
           </a:p>
           <a:p>
@@ -6368,14 +4141,164 @@
               </a:spcAft>
             </a:pPr>
             <a:r>
-              <a:rPr sz="1450">
+              <a:rPr sz="1350">
                 <a:solidFill>
                   <a:srgbClr val="1F2A44"/>
                 </a:solidFill>
               </a:rPr>
-              <a:t>•  Outlier handling: confirm flagged outliers don't disproportionately anchor a centroid (re-fit excluding them and compare); route to manual review rather than silent drop.</a:t>
-            </a:r>
-          </a:p>
+              <a:t>•  Ongoing monitoring: re-run on a fixed cadence (e.g. quarterly); track migration from Tier 0/1 into Tier 2 as a KPI as more purchase history accrues.</a:t>
+            </a:r>
+          </a:p>
+        </p:txBody>
+      </p:sp>
+    </p:spTree>
+  </p:cSld>
+  <p:clrMapOvr>
+    <a:masterClrMapping/>
+  </p:clrMapOvr>
+</p:sld>
+</file>
+
+<file path=ppt/slides/slide12.xml><?xml version="1.0" encoding="utf-8"?>
+<p:sld xmlns:a="http://schemas.openxmlformats.org/drawingml/2006/main" xmlns:p="http://schemas.openxmlformats.org/presentationml/2006/main" xmlns:r="http://schemas.openxmlformats.org/officeDocument/2006/relationships">
+  <p:cSld>
+    <p:spTree>
+      <p:nvGrpSpPr>
+        <p:cNvPr id="1" name=""/>
+        <p:cNvGrpSpPr/>
+        <p:nvPr/>
+      </p:nvGrpSpPr>
+      <p:grpSpPr/>
+      <p:sp>
+        <p:nvSpPr>
+          <p:cNvPr id="2" name="TextBox 1"/>
+          <p:cNvSpPr txBox="1"/>
+          <p:nvPr/>
+        </p:nvSpPr>
+        <p:spPr>
+          <a:xfrm>
+            <a:off x="457200" y="274320"/>
+            <a:ext cx="11247120" cy="822960"/>
+          </a:xfrm>
+          <a:prstGeom prst="rect">
+            <a:avLst/>
+          </a:prstGeom>
+          <a:noFill/>
+        </p:spPr>
+        <p:txBody>
+          <a:bodyPr wrap="square">
+            <a:spAutoFit/>
+          </a:bodyPr>
+          <a:lstStyle/>
+          <a:p>
+            <a:r>
+              <a:rPr sz="2700" b="1">
+                <a:solidFill>
+                  <a:srgbClr val="1F2A44"/>
+                </a:solidFill>
+              </a:rPr>
+              <a:t>Assumptions Taken</a:t>
+            </a:r>
+          </a:p>
+        </p:txBody>
+      </p:sp>
+      <p:sp>
+        <p:nvSpPr>
+          <p:cNvPr id="3" name="TextBox 2"/>
+          <p:cNvSpPr txBox="1"/>
+          <p:nvPr/>
+        </p:nvSpPr>
+        <p:spPr>
+          <a:xfrm>
+            <a:off x="457200" y="868680"/>
+            <a:ext cx="11247120" cy="365760"/>
+          </a:xfrm>
+          <a:prstGeom prst="rect">
+            <a:avLst/>
+          </a:prstGeom>
+          <a:noFill/>
+        </p:spPr>
+        <p:txBody>
+          <a:bodyPr wrap="none">
+            <a:spAutoFit/>
+          </a:bodyPr>
+          <a:lstStyle/>
+          <a:p>
+            <a:r>
+              <a:rPr sz="1350" i="1">
+                <a:solidFill>
+                  <a:srgbClr val="555555"/>
+                </a:solidFill>
+              </a:rPr>
+              <a:t>Highlighted per case-study instructions</a:t>
+            </a:r>
+          </a:p>
+        </p:txBody>
+      </p:sp>
+      <p:sp>
+        <p:nvSpPr>
+          <p:cNvPr id="4" name="Rectangle 3"/>
+          <p:cNvSpPr/>
+          <p:nvPr/>
+        </p:nvSpPr>
+        <p:spPr>
+          <a:xfrm>
+            <a:off x="457200" y="1188720"/>
+            <a:ext cx="11247120" cy="25400"/>
+          </a:xfrm>
+          <a:prstGeom prst="rect">
+            <a:avLst/>
+          </a:prstGeom>
+          <a:solidFill>
+            <a:srgbClr val="C0392B"/>
+          </a:solidFill>
+          <a:ln>
+            <a:noFill/>
+          </a:ln>
+        </p:spPr>
+        <p:style>
+          <a:lnRef idx="1">
+            <a:schemeClr val="accent1"/>
+          </a:lnRef>
+          <a:fillRef idx="3">
+            <a:schemeClr val="accent1"/>
+          </a:fillRef>
+          <a:effectRef idx="2">
+            <a:schemeClr val="accent1"/>
+          </a:effectRef>
+          <a:fontRef idx="minor">
+            <a:schemeClr val="lt1"/>
+          </a:fontRef>
+        </p:style>
+        <p:txBody>
+          <a:bodyPr rtlCol="0" anchor="ctr"/>
+          <a:lstStyle/>
+          <a:p>
+            <a:pPr algn="ctr"/>
+          </a:p>
+        </p:txBody>
+      </p:sp>
+      <p:sp>
+        <p:nvSpPr>
+          <p:cNvPr id="5" name="TextBox 4"/>
+          <p:cNvSpPr txBox="1"/>
+          <p:nvPr/>
+        </p:nvSpPr>
+        <p:spPr>
+          <a:xfrm>
+            <a:off x="457200" y="1417320"/>
+            <a:ext cx="11247120" cy="5349240"/>
+          </a:xfrm>
+          <a:prstGeom prst="rect">
+            <a:avLst/>
+          </a:prstGeom>
+          <a:noFill/>
+        </p:spPr>
+        <p:txBody>
+          <a:bodyPr wrap="square">
+            <a:normAutofit/>
+          </a:bodyPr>
+          <a:lstStyle/>
           <a:p>
             <a:pPr>
               <a:spcAft>
@@ -6383,12 +4306,2810 @@
               </a:spcAft>
             </a:pPr>
             <a:r>
+              <a:rPr sz="1500">
+                <a:solidFill>
+                  <a:srgbClr val="1F2A44"/>
+                </a:solidFill>
+              </a:rPr>
+              <a:t>•  Segments already marked Not_Assigned/None/– for a customer reflect “not computed / not applicable yet,” not a true zero value, and were preserved as an explicit category rather than imputed.</a:t>
+            </a:r>
+          </a:p>
+          <a:p>
+            <a:pPr>
+              <a:spcAft>
+                <a:spcPts val="800"/>
+              </a:spcAft>
+            </a:pPr>
+            <a:r>
+              <a:rPr sz="1500">
+                <a:solidFill>
+                  <a:srgbClr val="1F2A44"/>
+                </a:solidFill>
+              </a:rPr>
+              <a:t>•  Customers missing all 6 core behavioral segments are assumed to have no usable purchasing history yet (new or dormant accounts) and are reported as a separate business segment rather than clustered on missing data.</a:t>
+            </a:r>
+          </a:p>
+          <a:p>
+            <a:pPr>
+              <a:spcAft>
+                <a:spcPts val="800"/>
+              </a:spcAft>
+            </a:pPr>
+            <a:r>
+              <a:rPr sz="1500">
+                <a:solidFill>
+                  <a:srgbClr val="1F2A44"/>
+                </a:solidFill>
+              </a:rPr>
+              <a:t>•  Duplicate-looking records (identical fields aside from Customer_ID, or shared addresses) are treated as distinct accounts for this exercise — flagged for business confirmation rather than merged.</a:t>
+            </a:r>
+          </a:p>
+          <a:p>
+            <a:pPr>
+              <a:spcAft>
+                <a:spcPts val="800"/>
+              </a:spcAft>
+            </a:pPr>
+            <a:r>
+              <a:rPr sz="1500">
+                <a:solidFill>
+                  <a:srgbClr val="1F2A44"/>
+                </a:solidFill>
+              </a:rPr>
+              <a:t>•  Geographic behavior is assumed to be adequately captured by Competitiveness_Flag / Volume_Segment / Density_Segment, making raw City/State/Country redundant for a *behavioral* clustering.</a:t>
+            </a:r>
+          </a:p>
+          <a:p>
+            <a:pPr>
+              <a:spcAft>
+                <a:spcPts val="800"/>
+              </a:spcAft>
+            </a:pPr>
+            <a:r>
+              <a:rPr sz="1500">
+                <a:solidFill>
+                  <a:srgbClr val="1F2A44"/>
+                </a:solidFill>
+              </a:rPr>
+              <a:t>•  All 12 features are kept deliberately, even though a smaller feature set scores higher on paper (see Q2) — the business asked for a purchasing-behavior segmentation across everything provided, not the smallest set that maximizes one internal metric.</a:t>
+            </a:r>
+          </a:p>
+          <a:p>
+            <a:pPr>
+              <a:spcAft>
+                <a:spcPts val="800"/>
+              </a:spcAft>
+            </a:pPr>
+            <a:r>
+              <a:rPr sz="1500">
+                <a:solidFill>
+                  <a:srgbClr val="1F2A44"/>
+                </a:solidFill>
+              </a:rPr>
+              <a:t>•  k=4 (plus the 3 partial-profile segments and the not-yet-profiled group) is the primary recommendation; the notebook exposes k=2–8 so the business can revisit granularity as strategy needs evolve.</a:t>
+            </a:r>
+          </a:p>
+        </p:txBody>
+      </p:sp>
+    </p:spTree>
+  </p:cSld>
+  <p:clrMapOvr>
+    <a:masterClrMapping/>
+  </p:clrMapOvr>
+</p:sld>
+</file>
+
+<file path=ppt/slides/slide2.xml><?xml version="1.0" encoding="utf-8"?>
+<p:sld xmlns:a="http://schemas.openxmlformats.org/drawingml/2006/main" xmlns:p="http://schemas.openxmlformats.org/presentationml/2006/main" xmlns:r="http://schemas.openxmlformats.org/officeDocument/2006/relationships">
+  <p:cSld>
+    <p:spTree>
+      <p:nvGrpSpPr>
+        <p:cNvPr id="1" name=""/>
+        <p:cNvGrpSpPr/>
+        <p:nvPr/>
+      </p:nvGrpSpPr>
+      <p:grpSpPr/>
+      <p:sp>
+        <p:nvSpPr>
+          <p:cNvPr id="2" name="TextBox 1"/>
+          <p:cNvSpPr txBox="1"/>
+          <p:nvPr/>
+        </p:nvSpPr>
+        <p:spPr>
+          <a:xfrm>
+            <a:off x="457200" y="274320"/>
+            <a:ext cx="11247120" cy="822960"/>
+          </a:xfrm>
+          <a:prstGeom prst="rect">
+            <a:avLst/>
+          </a:prstGeom>
+          <a:noFill/>
+        </p:spPr>
+        <p:txBody>
+          <a:bodyPr wrap="square">
+            <a:spAutoFit/>
+          </a:bodyPr>
+          <a:lstStyle/>
+          <a:p>
+            <a:r>
+              <a:rPr sz="2700" b="1">
+                <a:solidFill>
+                  <a:srgbClr val="1F2A44"/>
+                </a:solidFill>
+              </a:rPr>
+              <a:t>Approach Overview</a:t>
+            </a:r>
+          </a:p>
+        </p:txBody>
+      </p:sp>
+      <p:sp>
+        <p:nvSpPr>
+          <p:cNvPr id="3" name="TextBox 2"/>
+          <p:cNvSpPr txBox="1"/>
+          <p:nvPr/>
+        </p:nvSpPr>
+        <p:spPr>
+          <a:xfrm>
+            <a:off x="457200" y="868680"/>
+            <a:ext cx="11247120" cy="365760"/>
+          </a:xfrm>
+          <a:prstGeom prst="rect">
+            <a:avLst/>
+          </a:prstGeom>
+          <a:noFill/>
+        </p:spPr>
+        <p:txBody>
+          <a:bodyPr wrap="none">
+            <a:spAutoFit/>
+          </a:bodyPr>
+          <a:lstStyle/>
+          <a:p>
+            <a:r>
+              <a:rPr sz="1350" i="1">
+                <a:solidFill>
+                  <a:srgbClr val="555555"/>
+                </a:solidFill>
+              </a:rPr>
+              <a:t>A tiered, validated pipeline — not a single clustering pass</a:t>
+            </a:r>
+          </a:p>
+        </p:txBody>
+      </p:sp>
+      <p:sp>
+        <p:nvSpPr>
+          <p:cNvPr id="4" name="Rectangle 3"/>
+          <p:cNvSpPr/>
+          <p:nvPr/>
+        </p:nvSpPr>
+        <p:spPr>
+          <a:xfrm>
+            <a:off x="457200" y="1188720"/>
+            <a:ext cx="11247120" cy="25400"/>
+          </a:xfrm>
+          <a:prstGeom prst="rect">
+            <a:avLst/>
+          </a:prstGeom>
+          <a:solidFill>
+            <a:srgbClr val="C0392B"/>
+          </a:solidFill>
+          <a:ln>
+            <a:noFill/>
+          </a:ln>
+        </p:spPr>
+        <p:style>
+          <a:lnRef idx="1">
+            <a:schemeClr val="accent1"/>
+          </a:lnRef>
+          <a:fillRef idx="3">
+            <a:schemeClr val="accent1"/>
+          </a:fillRef>
+          <a:effectRef idx="2">
+            <a:schemeClr val="accent1"/>
+          </a:effectRef>
+          <a:fontRef idx="minor">
+            <a:schemeClr val="lt1"/>
+          </a:fontRef>
+        </p:style>
+        <p:txBody>
+          <a:bodyPr rtlCol="0" anchor="ctr"/>
+          <a:lstStyle/>
+          <a:p>
+            <a:pPr algn="ctr"/>
+          </a:p>
+        </p:txBody>
+      </p:sp>
+      <p:sp>
+        <p:nvSpPr>
+          <p:cNvPr id="5" name="TextBox 4"/>
+          <p:cNvSpPr txBox="1"/>
+          <p:nvPr/>
+        </p:nvSpPr>
+        <p:spPr>
+          <a:xfrm>
+            <a:off x="457200" y="1417320"/>
+            <a:ext cx="11247120" cy="5349240"/>
+          </a:xfrm>
+          <a:prstGeom prst="rect">
+            <a:avLst/>
+          </a:prstGeom>
+          <a:noFill/>
+        </p:spPr>
+        <p:txBody>
+          <a:bodyPr wrap="square">
+            <a:normAutofit/>
+          </a:bodyPr>
+          <a:lstStyle/>
+          <a:p>
+            <a:pPr>
+              <a:spcAft>
+                <a:spcPts val="800"/>
+              </a:spcAft>
+            </a:pPr>
+            <a:r>
+              <a:rPr sz="1500">
+                <a:solidFill>
+                  <a:srgbClr val="1F2A44"/>
+                </a:solidFill>
+              </a:rPr>
+              <a:t>•  Dataset: 3,030 customers × 18 columns — 6 address/ID fields + 12 categorical business-segment features (no numeric columns).</a:t>
+            </a:r>
+          </a:p>
+          <a:p>
+            <a:pPr>
+              <a:spcAft>
+                <a:spcPts val="800"/>
+              </a:spcAft>
+            </a:pPr>
+            <a:r>
+              <a:rPr sz="1500">
+                <a:solidFill>
+                  <a:srgbClr val="1F2A44"/>
+                </a:solidFill>
+              </a:rPr>
+              <a:t>•  Step 1 — Data quality scan (Q5): unify inconsistent null markers; discover the core segments go missing in two distinct blocks, not randomly.</a:t>
+            </a:r>
+          </a:p>
+          <a:p>
+            <a:pPr>
+              <a:spcAft>
+                <a:spcPts val="800"/>
+              </a:spcAft>
+            </a:pPr>
+            <a:r>
+              <a:rPr sz="1500">
+                <a:solidFill>
+                  <a:srgbClr val="1F2A44"/>
+                </a:solidFill>
+              </a:rPr>
+              <a:t>•  Step 2 — Tiering (Q2): split customers by data completeness before modeling. Only customers with zero core missingness are behaviorally clustered; the rest become 3 explicit, actionable “data-gap” segments instead of noise.</a:t>
+            </a:r>
+          </a:p>
+          <a:p>
+            <a:pPr>
+              <a:spcAft>
+                <a:spcPts val="800"/>
+              </a:spcAft>
+            </a:pPr>
+            <a:r>
+              <a:rPr sz="1500">
+                <a:solidFill>
+                  <a:srgbClr val="1F2A44"/>
+                </a:solidFill>
+              </a:rPr>
+              <a:t>•  Step 3 — Feature selection (Q2): tested reducing to 2-6 features (silhouette jumps to 0.97) and explicitly rejected it — that trivializes to a 2-variable crosstab and discards Profit/Churn/Competitiveness/Volume/Density. All 12 features are kept.</a:t>
+            </a:r>
+          </a:p>
+          <a:p>
+            <a:pPr>
+              <a:spcAft>
+                <a:spcPts val="800"/>
+              </a:spcAft>
+            </a:pPr>
+            <a:r>
+              <a:rPr sz="1500">
+                <a:solidFill>
+                  <a:srgbClr val="1F2A44"/>
+                </a:solidFill>
+              </a:rPr>
+              <a:t>•  Step 4 — Clustering (Q1): MCA (10 components) + K-Means, chosen after benchmarking against K-Modes, Agglomerative clustering, GMM, Spectral clustering, Birch, and DBSCAN on identical footing.</a:t>
+            </a:r>
+          </a:p>
+          <a:p>
+            <a:pPr>
+              <a:spcAft>
+                <a:spcPts val="800"/>
+              </a:spcAft>
+            </a:pPr>
+            <a:r>
+              <a:rPr sz="1500">
+                <a:solidFill>
+                  <a:srgbClr val="1F2A44"/>
+                </a:solidFill>
+              </a:rPr>
+              <a:t>•  Step 5 — Visualization (Q3): 2-D MCA projection colored by final segment.</a:t>
+            </a:r>
+          </a:p>
+          <a:p>
+            <a:pPr>
+              <a:spcAft>
+                <a:spcPts val="800"/>
+              </a:spcAft>
+            </a:pPr>
+            <a:r>
+              <a:rPr sz="1500">
+                <a:solidFill>
+                  <a:srgbClr val="1F2A44"/>
+                </a:solidFill>
+              </a:rPr>
+              <a:t>•  Step 6 — Outlier detection (Q4): two categorical-native methods (AVF + centroid-distance).</a:t>
+            </a:r>
+          </a:p>
+          <a:p>
+            <a:pPr>
+              <a:spcAft>
+                <a:spcPts val="800"/>
+              </a:spcAft>
+            </a:pPr>
+            <a:r>
+              <a:rPr sz="1500">
+                <a:solidFill>
+                  <a:srgbClr val="1F2A44"/>
+                </a:solidFill>
+              </a:rPr>
+              <a:t>•  Step 7 — Validation (Q6): silhouette, stability, feature-sensitivity, and held-out geography cross-tab all executed and reported, not just listed.</a:t>
+            </a:r>
+          </a:p>
+        </p:txBody>
+      </p:sp>
+    </p:spTree>
+  </p:cSld>
+  <p:clrMapOvr>
+    <a:masterClrMapping/>
+  </p:clrMapOvr>
+</p:sld>
+</file>
+
+<file path=ppt/slides/slide3.xml><?xml version="1.0" encoding="utf-8"?>
+<p:sld xmlns:a="http://schemas.openxmlformats.org/drawingml/2006/main" xmlns:p="http://schemas.openxmlformats.org/presentationml/2006/main" xmlns:r="http://schemas.openxmlformats.org/officeDocument/2006/relationships">
+  <p:cSld>
+    <p:spTree>
+      <p:nvGrpSpPr>
+        <p:cNvPr id="1" name=""/>
+        <p:cNvGrpSpPr/>
+        <p:nvPr/>
+      </p:nvGrpSpPr>
+      <p:grpSpPr/>
+      <p:sp>
+        <p:nvSpPr>
+          <p:cNvPr id="2" name="TextBox 1"/>
+          <p:cNvSpPr txBox="1"/>
+          <p:nvPr/>
+        </p:nvSpPr>
+        <p:spPr>
+          <a:xfrm>
+            <a:off x="457200" y="274320"/>
+            <a:ext cx="11247120" cy="822960"/>
+          </a:xfrm>
+          <a:prstGeom prst="rect">
+            <a:avLst/>
+          </a:prstGeom>
+          <a:noFill/>
+        </p:spPr>
+        <p:txBody>
+          <a:bodyPr wrap="square">
+            <a:spAutoFit/>
+          </a:bodyPr>
+          <a:lstStyle/>
+          <a:p>
+            <a:r>
+              <a:rPr sz="2700" b="1">
+                <a:solidFill>
+                  <a:srgbClr val="1F2A44"/>
+                </a:solidFill>
+              </a:rPr>
+              <a:t>Q1. Choosing an Algorithm From the Data's Properties</a:t>
+            </a:r>
+          </a:p>
+        </p:txBody>
+      </p:sp>
+      <p:sp>
+        <p:nvSpPr>
+          <p:cNvPr id="3" name="TextBox 2"/>
+          <p:cNvSpPr txBox="1"/>
+          <p:nvPr/>
+        </p:nvSpPr>
+        <p:spPr>
+          <a:xfrm>
+            <a:off x="457200" y="868680"/>
+            <a:ext cx="11247120" cy="365760"/>
+          </a:xfrm>
+          <a:prstGeom prst="rect">
+            <a:avLst/>
+          </a:prstGeom>
+          <a:noFill/>
+        </p:spPr>
+        <p:txBody>
+          <a:bodyPr wrap="none">
+            <a:spAutoFit/>
+          </a:bodyPr>
+          <a:lstStyle/>
+          <a:p>
+            <a:r>
+              <a:rPr sz="1350" i="1">
+                <a:solidFill>
+                  <a:srgbClr val="555555"/>
+                </a:solidFill>
+              </a:rPr>
+              <a:t>The algorithm follows from what the data is — not picked by trial and error</a:t>
+            </a:r>
+          </a:p>
+        </p:txBody>
+      </p:sp>
+      <p:sp>
+        <p:nvSpPr>
+          <p:cNvPr id="4" name="Rectangle 3"/>
+          <p:cNvSpPr/>
+          <p:nvPr/>
+        </p:nvSpPr>
+        <p:spPr>
+          <a:xfrm>
+            <a:off x="457200" y="1188720"/>
+            <a:ext cx="11247120" cy="25400"/>
+          </a:xfrm>
+          <a:prstGeom prst="rect">
+            <a:avLst/>
+          </a:prstGeom>
+          <a:solidFill>
+            <a:srgbClr val="C0392B"/>
+          </a:solidFill>
+          <a:ln>
+            <a:noFill/>
+          </a:ln>
+        </p:spPr>
+        <p:style>
+          <a:lnRef idx="1">
+            <a:schemeClr val="accent1"/>
+          </a:lnRef>
+          <a:fillRef idx="3">
+            <a:schemeClr val="accent1"/>
+          </a:fillRef>
+          <a:effectRef idx="2">
+            <a:schemeClr val="accent1"/>
+          </a:effectRef>
+          <a:fontRef idx="minor">
+            <a:schemeClr val="lt1"/>
+          </a:fontRef>
+        </p:style>
+        <p:txBody>
+          <a:bodyPr rtlCol="0" anchor="ctr"/>
+          <a:lstStyle/>
+          <a:p>
+            <a:pPr algn="ctr"/>
+          </a:p>
+        </p:txBody>
+      </p:sp>
+      <p:sp>
+        <p:nvSpPr>
+          <p:cNvPr id="5" name="TextBox 4"/>
+          <p:cNvSpPr txBox="1"/>
+          <p:nvPr/>
+        </p:nvSpPr>
+        <p:spPr>
+          <a:xfrm>
+            <a:off x="457200" y="1417320"/>
+            <a:ext cx="11247120" cy="5349240"/>
+          </a:xfrm>
+          <a:prstGeom prst="rect">
+            <a:avLst/>
+          </a:prstGeom>
+          <a:noFill/>
+        </p:spPr>
+        <p:txBody>
+          <a:bodyPr wrap="square">
+            <a:normAutofit/>
+          </a:bodyPr>
+          <a:lstStyle/>
+          <a:p>
+            <a:pPr>
+              <a:spcAft>
+                <a:spcPts val="800"/>
+              </a:spcAft>
+            </a:pPr>
+            <a:r>
+              <a:rPr sz="1400">
+                <a:solidFill>
+                  <a:srgbClr val="1F2A44"/>
+                </a:solidFill>
+              </a:rPr>
+              <a:t>•  Property: all 12 usable features are categorical (mixed ordinal, e.g. Revenue L/M/H, and nominal, e.g. Seasonality). No numeric columns exist anywhere in the dataset.</a:t>
+            </a:r>
+          </a:p>
+          <a:p>
+            <a:pPr>
+              <a:spcAft>
+                <a:spcPts val="800"/>
+              </a:spcAft>
+            </a:pPr>
+            <a:r>
+              <a:rPr sz="1250">
+                <a:solidFill>
+                  <a:srgbClr val="555555"/>
+                </a:solidFill>
+              </a:rPr>
+              <a:t>      -  -&gt; K-Means directly on category codes is invalid: assigning L=1, M=2, H=3 fabricates distances that aren't real, and nominal fields (e.g. Seasonality) have no order to encode as numbers at all.</a:t>
+            </a:r>
+          </a:p>
+          <a:p>
+            <a:pPr>
+              <a:spcAft>
+                <a:spcPts val="800"/>
+              </a:spcAft>
+            </a:pPr>
+            <a:r>
+              <a:rPr sz="1400">
+                <a:solidFill>
+                  <a:srgbClr val="1F2A44"/>
+                </a:solidFill>
+              </a:rPr>
+              <a:t>•  Property: missingness is structured in two correlated blocks, not random (Q2) -&gt; any distance metric must treat “unknown” as genuinely distinct from “equal,” not as an ordinary category.</a:t>
+            </a:r>
+          </a:p>
+          <a:p>
+            <a:pPr>
+              <a:spcAft>
+                <a:spcPts val="800"/>
+              </a:spcAft>
+            </a:pPr>
+            <a:r>
+              <a:rPr sz="1250">
+                <a:solidFill>
+                  <a:srgbClr val="555555"/>
+                </a:solidFill>
+              </a:rPr>
+              <a:t>      -  -&gt; A Gower-style distance is used that excludes a feature from a pair's comparison whenever either customer is “Not_Assigned” there.</a:t>
+            </a:r>
+          </a:p>
+          <a:p>
+            <a:pPr>
+              <a:spcAft>
+                <a:spcPts val="800"/>
+              </a:spcAft>
+            </a:pPr>
+            <a:r>
+              <a:rPr sz="1400">
+                <a:solidFill>
+                  <a:srgbClr val="1F2A44"/>
+                </a:solidFill>
+              </a:rPr>
+              <a:t>•  Given both properties: K-Modes (Huang) is the textbook fit for pure categorical data and is tried first as the baseline — but its matching dissimilarity is coarse (only 13 possible discrete values across 12 features), which is why it caps out at 0.20-0.28 silhouette. That's a property of the metric, not a bug in the algorithm.</a:t>
+            </a:r>
+          </a:p>
+          <a:p>
+            <a:pPr>
+              <a:spcAft>
+                <a:spcPts val="800"/>
+              </a:spcAft>
+            </a:pPr>
+            <a:r>
+              <a:rPr sz="1400">
+                <a:solidFill>
+                  <a:srgbClr val="1F2A44"/>
+                </a:solidFill>
+              </a:rPr>
+              <a:t>•  Multiple Correspondence Analysis (MCA) is the established technique (French school of data analysis; Husson, Josse &amp; Pagès' HCPC method) for projecting categorical variables into a continuous space that preserves chi-square association between categories — at which point continuous-geometry methods like K-Means become valid to apply, not just convenient.</a:t>
+            </a:r>
+          </a:p>
+          <a:p>
+            <a:pPr>
+              <a:spcAft>
+                <a:spcPts val="800"/>
+              </a:spcAft>
+            </a:pPr>
+            <a:r>
+              <a:rPr sz="1400">
+                <a:solidFill>
+                  <a:srgbClr val="1F2A44"/>
+                </a:solidFill>
+              </a:rPr>
+              <a:t>•  This also coheres with Q3, which independently calls for MCA for the 2-D plot — one transform serves both purposes rather than stitching together unrelated techniques.</a:t>
+            </a:r>
+          </a:p>
+        </p:txBody>
+      </p:sp>
+    </p:spTree>
+  </p:cSld>
+  <p:clrMapOvr>
+    <a:masterClrMapping/>
+  </p:clrMapOvr>
+</p:sld>
+</file>
+
+<file path=ppt/slides/slide4.xml><?xml version="1.0" encoding="utf-8"?>
+<p:sld xmlns:a="http://schemas.openxmlformats.org/drawingml/2006/main" xmlns:p="http://schemas.openxmlformats.org/presentationml/2006/main" xmlns:r="http://schemas.openxmlformats.org/officeDocument/2006/relationships">
+  <p:cSld>
+    <p:spTree>
+      <p:nvGrpSpPr>
+        <p:cNvPr id="1" name=""/>
+        <p:cNvGrpSpPr/>
+        <p:nvPr/>
+      </p:nvGrpSpPr>
+      <p:grpSpPr/>
+      <p:sp>
+        <p:nvSpPr>
+          <p:cNvPr id="2" name="TextBox 1"/>
+          <p:cNvSpPr txBox="1"/>
+          <p:nvPr/>
+        </p:nvSpPr>
+        <p:spPr>
+          <a:xfrm>
+            <a:off x="457200" y="274320"/>
+            <a:ext cx="11247120" cy="822960"/>
+          </a:xfrm>
+          <a:prstGeom prst="rect">
+            <a:avLst/>
+          </a:prstGeom>
+          <a:noFill/>
+        </p:spPr>
+        <p:txBody>
+          <a:bodyPr wrap="square">
+            <a:spAutoFit/>
+          </a:bodyPr>
+          <a:lstStyle/>
+          <a:p>
+            <a:r>
+              <a:rPr sz="2700" b="1">
+                <a:solidFill>
+                  <a:srgbClr val="1F2A44"/>
+                </a:solidFill>
+              </a:rPr>
+              <a:t>Q1. Final Model &amp; Confirmatory Bake-Off</a:t>
+            </a:r>
+          </a:p>
+        </p:txBody>
+      </p:sp>
+      <p:sp>
+        <p:nvSpPr>
+          <p:cNvPr id="3" name="TextBox 2"/>
+          <p:cNvSpPr txBox="1"/>
+          <p:nvPr/>
+        </p:nvSpPr>
+        <p:spPr>
+          <a:xfrm>
+            <a:off x="457200" y="868680"/>
+            <a:ext cx="11247120" cy="365760"/>
+          </a:xfrm>
+          <a:prstGeom prst="rect">
+            <a:avLst/>
+          </a:prstGeom>
+          <a:noFill/>
+        </p:spPr>
+        <p:txBody>
+          <a:bodyPr wrap="none">
+            <a:spAutoFit/>
+          </a:bodyPr>
+          <a:lstStyle/>
+          <a:p>
+            <a:r>
+              <a:rPr sz="1350" i="1">
+                <a:solidFill>
+                  <a:srgbClr val="555555"/>
+                </a:solidFill>
+              </a:rPr>
+              <a:t>MCA + K-Means, with alternatives checked as evidence — not as the basis for the choice</a:t>
+            </a:r>
+          </a:p>
+        </p:txBody>
+      </p:sp>
+      <p:sp>
+        <p:nvSpPr>
+          <p:cNvPr id="4" name="Rectangle 3"/>
+          <p:cNvSpPr/>
+          <p:nvPr/>
+        </p:nvSpPr>
+        <p:spPr>
+          <a:xfrm>
+            <a:off x="457200" y="1188720"/>
+            <a:ext cx="11247120" cy="25400"/>
+          </a:xfrm>
+          <a:prstGeom prst="rect">
+            <a:avLst/>
+          </a:prstGeom>
+          <a:solidFill>
+            <a:srgbClr val="C0392B"/>
+          </a:solidFill>
+          <a:ln>
+            <a:noFill/>
+          </a:ln>
+        </p:spPr>
+        <p:style>
+          <a:lnRef idx="1">
+            <a:schemeClr val="accent1"/>
+          </a:lnRef>
+          <a:fillRef idx="3">
+            <a:schemeClr val="accent1"/>
+          </a:fillRef>
+          <a:effectRef idx="2">
+            <a:schemeClr val="accent1"/>
+          </a:effectRef>
+          <a:fontRef idx="minor">
+            <a:schemeClr val="lt1"/>
+          </a:fontRef>
+        </p:style>
+        <p:txBody>
+          <a:bodyPr rtlCol="0" anchor="ctr"/>
+          <a:lstStyle/>
+          <a:p>
+            <a:pPr algn="ctr"/>
+          </a:p>
+        </p:txBody>
+      </p:sp>
+      <p:sp>
+        <p:nvSpPr>
+          <p:cNvPr id="5" name="TextBox 4"/>
+          <p:cNvSpPr txBox="1"/>
+          <p:nvPr/>
+        </p:nvSpPr>
+        <p:spPr>
+          <a:xfrm>
+            <a:off x="457200" y="1417320"/>
+            <a:ext cx="11247120" cy="5349240"/>
+          </a:xfrm>
+          <a:prstGeom prst="rect">
+            <a:avLst/>
+          </a:prstGeom>
+          <a:noFill/>
+        </p:spPr>
+        <p:txBody>
+          <a:bodyPr wrap="square">
+            <a:normAutofit/>
+          </a:bodyPr>
+          <a:lstStyle/>
+          <a:p>
+            <a:pPr>
+              <a:spcAft>
+                <a:spcPts val="800"/>
+              </a:spcAft>
+            </a:pPr>
+            <a:r>
+              <a:rPr sz="1550">
+                <a:solidFill>
+                  <a:srgbClr val="1F2A44"/>
+                </a:solidFill>
+              </a:rPr>
+              <a:t>•  Customers are first split by data completeness (Q2); only the 753 customers with zero core missingness are behaviorally clustered.</a:t>
+            </a:r>
+          </a:p>
+          <a:p>
+            <a:pPr>
+              <a:spcAft>
+                <a:spcPts val="800"/>
+              </a:spcAft>
+            </a:pPr>
+            <a:r>
+              <a:rPr sz="1550">
+                <a:solidFill>
+                  <a:srgbClr val="1F2A44"/>
+                </a:solidFill>
+              </a:rPr>
+              <a:t>•  Final model: features are projected into a 10-component continuous MCA space (~60% cumulative inertia, where adding more components stops improving results), then K-Means clusters within that space.</a:t>
+            </a:r>
+          </a:p>
+          <a:p>
+            <a:pPr>
+              <a:spcAft>
+                <a:spcPts val="800"/>
+              </a:spcAft>
+            </a:pPr>
+            <a:r>
+              <a:rPr sz="1550">
+                <a:solidFill>
+                  <a:srgbClr val="1F2A44"/>
+                </a:solidFill>
+              </a:rPr>
+              <a:t>•  k=4 chosen via a clear silhouette peak (0.393), well above k=3 (0.370) and k=5 (0.372).</a:t>
+            </a:r>
+          </a:p>
+          <a:p>
+            <a:pPr>
+              <a:spcAft>
+                <a:spcPts val="800"/>
+              </a:spcAft>
+            </a:pPr>
+            <a:r>
+              <a:rPr sz="1550">
+                <a:solidFill>
+                  <a:srgbClr val="1F2A44"/>
+                </a:solidFill>
+              </a:rPr>
+              <a:t>•  Confirmatory check: benchmarked against 5 alternatives on identical footing (same Gower-based silhouette) — K-Modes (naive), Agglomerative clustering, Gaussian Mixture Models, Spectral clustering, Birch, and DBSCAN. K-Means won on negative-silhouette share and worst-cluster silhouette; DBSCAN and Birch were rejected outright (degenerate splits, unusable for a segmentation everyone must fit into).</a:t>
+            </a:r>
+          </a:p>
+          <a:p>
+            <a:pPr>
+              <a:spcAft>
+                <a:spcPts val="800"/>
+              </a:spcAft>
+            </a:pPr>
+            <a:r>
+              <a:rPr sz="1550">
+                <a:solidFill>
+                  <a:srgbClr val="1F2A44"/>
+                </a:solidFill>
+              </a:rPr>
+              <a:t>•  Result: 4 behavioral clusters + 3 partial-profile segments + 1 not-yet-profiled segment = 8 customer segments covering all 3,030 accounts.</a:t>
+            </a:r>
+          </a:p>
+        </p:txBody>
+      </p:sp>
+    </p:spTree>
+  </p:cSld>
+  <p:clrMapOvr>
+    <a:masterClrMapping/>
+  </p:clrMapOvr>
+</p:sld>
+</file>
+
+<file path=ppt/slides/slide5.xml><?xml version="1.0" encoding="utf-8"?>
+<p:sld xmlns:a="http://schemas.openxmlformats.org/drawingml/2006/main" xmlns:p="http://schemas.openxmlformats.org/presentationml/2006/main" xmlns:r="http://schemas.openxmlformats.org/officeDocument/2006/relationships">
+  <p:cSld>
+    <p:spTree>
+      <p:nvGrpSpPr>
+        <p:cNvPr id="1" name=""/>
+        <p:cNvGrpSpPr/>
+        <p:nvPr/>
+      </p:nvGrpSpPr>
+      <p:grpSpPr/>
+      <p:sp>
+        <p:nvSpPr>
+          <p:cNvPr id="2" name="TextBox 1"/>
+          <p:cNvSpPr txBox="1"/>
+          <p:nvPr/>
+        </p:nvSpPr>
+        <p:spPr>
+          <a:xfrm>
+            <a:off x="457200" y="274320"/>
+            <a:ext cx="11247120" cy="822960"/>
+          </a:xfrm>
+          <a:prstGeom prst="rect">
+            <a:avLst/>
+          </a:prstGeom>
+          <a:noFill/>
+        </p:spPr>
+        <p:txBody>
+          <a:bodyPr wrap="square">
+            <a:spAutoFit/>
+          </a:bodyPr>
+          <a:lstStyle/>
+          <a:p>
+            <a:r>
+              <a:rPr sz="2700" b="1">
+                <a:solidFill>
+                  <a:srgbClr val="1F2A44"/>
+                </a:solidFill>
+              </a:rPr>
+              <a:t>Model Validation: Measured, Not Asserted</a:t>
+            </a:r>
+          </a:p>
+        </p:txBody>
+      </p:sp>
+      <p:sp>
+        <p:nvSpPr>
+          <p:cNvPr id="3" name="TextBox 2"/>
+          <p:cNvSpPr txBox="1"/>
+          <p:nvPr/>
+        </p:nvSpPr>
+        <p:spPr>
+          <a:xfrm>
+            <a:off x="457200" y="868680"/>
+            <a:ext cx="11247120" cy="365760"/>
+          </a:xfrm>
+          <a:prstGeom prst="rect">
+            <a:avLst/>
+          </a:prstGeom>
+          <a:noFill/>
+        </p:spPr>
+        <p:txBody>
+          <a:bodyPr wrap="none">
+            <a:spAutoFit/>
+          </a:bodyPr>
+          <a:lstStyle/>
+          <a:p>
+            <a:r>
+              <a:rPr sz="1350" i="1">
+                <a:solidFill>
+                  <a:srgbClr val="555555"/>
+                </a:solidFill>
+              </a:rPr>
+              <a:t>Every number below was computed against the actual model, including two earlier rejected versions</a:t>
+            </a:r>
+          </a:p>
+        </p:txBody>
+      </p:sp>
+      <p:sp>
+        <p:nvSpPr>
+          <p:cNvPr id="4" name="Rectangle 3"/>
+          <p:cNvSpPr/>
+          <p:nvPr/>
+        </p:nvSpPr>
+        <p:spPr>
+          <a:xfrm>
+            <a:off x="457200" y="1188720"/>
+            <a:ext cx="11247120" cy="25400"/>
+          </a:xfrm>
+          <a:prstGeom prst="rect">
+            <a:avLst/>
+          </a:prstGeom>
+          <a:solidFill>
+            <a:srgbClr val="C0392B"/>
+          </a:solidFill>
+          <a:ln>
+            <a:noFill/>
+          </a:ln>
+        </p:spPr>
+        <p:style>
+          <a:lnRef idx="1">
+            <a:schemeClr val="accent1"/>
+          </a:lnRef>
+          <a:fillRef idx="3">
+            <a:schemeClr val="accent1"/>
+          </a:fillRef>
+          <a:effectRef idx="2">
+            <a:schemeClr val="accent1"/>
+          </a:effectRef>
+          <a:fontRef idx="minor">
+            <a:schemeClr val="lt1"/>
+          </a:fontRef>
+        </p:style>
+        <p:txBody>
+          <a:bodyPr rtlCol="0" anchor="ctr"/>
+          <a:lstStyle/>
+          <a:p>
+            <a:pPr algn="ctr"/>
+          </a:p>
+        </p:txBody>
+      </p:sp>
+      <p:graphicFrame>
+        <p:nvGraphicFramePr>
+          <p:cNvPr id="5" name="Table 4"/>
+          <p:cNvGraphicFramePr>
+            <a:graphicFrameLocks noGrp="1"/>
+          </p:cNvGraphicFramePr>
+          <p:nvPr/>
+        </p:nvGraphicFramePr>
+        <p:xfrm>
+          <a:off x="457200" y="1417320"/>
+          <a:ext cx="11247120" cy="2377440"/>
+        </p:xfrm>
+        <a:graphic>
+          <a:graphicData uri="http://schemas.openxmlformats.org/drawingml/2006/table">
+            <a:tbl>
+              <a:tblPr firstRow="1" bandRow="1">
+                <a:tableStyleId>{5C22544A-7EE6-4342-B048-85BDC9FD1C3A}</a:tableStyleId>
+              </a:tblPr>
+              <a:tblGrid>
+                <a:gridCol w="2811780"/>
+                <a:gridCol w="2811780"/>
+                <a:gridCol w="2811780"/>
+                <a:gridCol w="2811780"/>
+              </a:tblGrid>
+              <a:tr h="475488">
+                <a:tc>
+                  <a:txBody>
+                    <a:bodyPr/>
+                    <a:lstStyle/>
+                    <a:p>
+                      <a:pPr>
+                        <a:defRPr sz="1200" b="1">
+                          <a:solidFill>
+                            <a:srgbClr val="FFFFFF"/>
+                          </a:solidFill>
+                        </a:defRPr>
+                      </a:pPr>
+                      <a:r>
+                        <a:t>Approach</a:t>
+                      </a:r>
+                    </a:p>
+                  </a:txBody>
+                  <a:tcPr>
+                    <a:solidFill>
+                      <a:srgbClr val="1F2A44"/>
+                    </a:solidFill>
+                  </a:tcPr>
+                </a:tc>
+                <a:tc>
+                  <a:txBody>
+                    <a:bodyPr/>
+                    <a:lstStyle/>
+                    <a:p>
+                      <a:pPr>
+                        <a:defRPr sz="1200" b="1">
+                          <a:solidFill>
+                            <a:srgbClr val="FFFFFF"/>
+                          </a:solidFill>
+                        </a:defRPr>
+                      </a:pPr>
+                      <a:r>
+                        <a:t>Naive K-Modes</a:t>
+                      </a:r>
+                    </a:p>
+                    <a:p>
+                      <a:pPr>
+                        <a:defRPr sz="1200" b="1">
+                          <a:solidFill>
+                            <a:srgbClr val="FFFFFF"/>
+                          </a:solidFill>
+                        </a:defRPr>
+                      </a:pPr>
+                      <a:r>
+                        <a:t>(everyone together)</a:t>
+                      </a:r>
+                    </a:p>
+                  </a:txBody>
+                  <a:tcPr>
+                    <a:solidFill>
+                      <a:srgbClr val="1F2A44"/>
+                    </a:solidFill>
+                  </a:tcPr>
+                </a:tc>
+                <a:tc>
+                  <a:txBody>
+                    <a:bodyPr/>
+                    <a:lstStyle/>
+                    <a:p>
+                      <a:pPr>
+                        <a:defRPr sz="1200" b="1">
+                          <a:solidFill>
+                            <a:srgbClr val="FFFFFF"/>
+                          </a:solidFill>
+                        </a:defRPr>
+                      </a:pPr>
+                      <a:r>
+                        <a:t>Tiered + Agglomerative</a:t>
+                      </a:r>
+                    </a:p>
+                    <a:p>
+                      <a:pPr>
+                        <a:defRPr sz="1200" b="1">
+                          <a:solidFill>
+                            <a:srgbClr val="FFFFFF"/>
+                          </a:solidFill>
+                        </a:defRPr>
+                      </a:pPr>
+                      <a:r>
+                        <a:t>(Gower distance)</a:t>
+                      </a:r>
+                    </a:p>
+                  </a:txBody>
+                  <a:tcPr>
+                    <a:solidFill>
+                      <a:srgbClr val="1F2A44"/>
+                    </a:solidFill>
+                  </a:tcPr>
+                </a:tc>
+                <a:tc>
+                  <a:txBody>
+                    <a:bodyPr/>
+                    <a:lstStyle/>
+                    <a:p>
+                      <a:pPr>
+                        <a:defRPr sz="1200" b="1">
+                          <a:solidFill>
+                            <a:srgbClr val="FFFFFF"/>
+                          </a:solidFill>
+                        </a:defRPr>
+                      </a:pPr>
+                      <a:r>
+                        <a:t>Tiered + MCA + K-Means</a:t>
+                      </a:r>
+                    </a:p>
+                    <a:p>
+                      <a:pPr>
+                        <a:defRPr sz="1200" b="1">
+                          <a:solidFill>
+                            <a:srgbClr val="FFFFFF"/>
+                          </a:solidFill>
+                        </a:defRPr>
+                      </a:pPr>
+                      <a:r>
+                        <a:t>(FINAL)</a:t>
+                      </a:r>
+                    </a:p>
+                  </a:txBody>
+                  <a:tcPr>
+                    <a:solidFill>
+                      <a:srgbClr val="1F2A44"/>
+                    </a:solidFill>
+                  </a:tcPr>
+                </a:tc>
+              </a:tr>
+              <a:tr h="475488">
+                <a:tc>
+                  <a:txBody>
+                    <a:bodyPr/>
+                    <a:lstStyle/>
+                    <a:p>
+                      <a:pPr>
+                        <a:defRPr sz="1200">
+                          <a:solidFill>
+                            <a:srgbClr val="222222"/>
+                          </a:solidFill>
+                        </a:defRPr>
+                      </a:pPr>
+                      <a:r>
+                        <a:t>Silhouette (Gower-based)</a:t>
+                      </a:r>
+                    </a:p>
+                  </a:txBody>
+                  <a:tcPr/>
+                </a:tc>
+                <a:tc>
+                  <a:txBody>
+                    <a:bodyPr/>
+                    <a:lstStyle/>
+                    <a:p>
+                      <a:pPr>
+                        <a:defRPr sz="1200">
+                          <a:solidFill>
+                            <a:srgbClr val="222222"/>
+                          </a:solidFill>
+                        </a:defRPr>
+                      </a:pPr>
+                      <a:r>
+                        <a:t>0.203</a:t>
+                      </a:r>
+                    </a:p>
+                  </a:txBody>
+                  <a:tcPr/>
+                </a:tc>
+                <a:tc>
+                  <a:txBody>
+                    <a:bodyPr/>
+                    <a:lstStyle/>
+                    <a:p>
+                      <a:pPr>
+                        <a:defRPr sz="1200">
+                          <a:solidFill>
+                            <a:srgbClr val="222222"/>
+                          </a:solidFill>
+                        </a:defRPr>
+                      </a:pPr>
+                      <a:r>
+                        <a:t>0.275</a:t>
+                      </a:r>
+                    </a:p>
+                  </a:txBody>
+                  <a:tcPr/>
+                </a:tc>
+                <a:tc>
+                  <a:txBody>
+                    <a:bodyPr/>
+                    <a:lstStyle/>
+                    <a:p>
+                      <a:pPr>
+                        <a:defRPr sz="1200">
+                          <a:solidFill>
+                            <a:srgbClr val="222222"/>
+                          </a:solidFill>
+                        </a:defRPr>
+                      </a:pPr>
+                      <a:r>
+                        <a:t>0.393</a:t>
+                      </a:r>
+                    </a:p>
+                  </a:txBody>
+                  <a:tcPr/>
+                </a:tc>
+              </a:tr>
+              <a:tr h="475488">
+                <a:tc>
+                  <a:txBody>
+                    <a:bodyPr/>
+                    <a:lstStyle/>
+                    <a:p>
+                      <a:pPr>
+                        <a:defRPr sz="1200">
+                          <a:solidFill>
+                            <a:srgbClr val="222222"/>
+                          </a:solidFill>
+                        </a:defRPr>
+                      </a:pPr>
+                      <a:r>
+                        <a:t>% customers, negative silhouette</a:t>
+                      </a:r>
+                    </a:p>
+                  </a:txBody>
+                  <a:tcPr/>
+                </a:tc>
+                <a:tc>
+                  <a:txBody>
+                    <a:bodyPr/>
+                    <a:lstStyle/>
+                    <a:p>
+                      <a:pPr>
+                        <a:defRPr sz="1200">
+                          <a:solidFill>
+                            <a:srgbClr val="222222"/>
+                          </a:solidFill>
+                        </a:defRPr>
+                      </a:pPr>
+                      <a:r>
+                        <a:t>18.9%</a:t>
+                      </a:r>
+                    </a:p>
+                  </a:txBody>
+                  <a:tcPr/>
+                </a:tc>
+                <a:tc>
+                  <a:txBody>
+                    <a:bodyPr/>
+                    <a:lstStyle/>
+                    <a:p>
+                      <a:pPr>
+                        <a:defRPr sz="1200">
+                          <a:solidFill>
+                            <a:srgbClr val="222222"/>
+                          </a:solidFill>
+                        </a:defRPr>
+                      </a:pPr>
+                      <a:r>
+                        <a:t>7.3%</a:t>
+                      </a:r>
+                    </a:p>
+                  </a:txBody>
+                  <a:tcPr/>
+                </a:tc>
+                <a:tc>
+                  <a:txBody>
+                    <a:bodyPr/>
+                    <a:lstStyle/>
+                    <a:p>
+                      <a:pPr>
+                        <a:defRPr sz="1200">
+                          <a:solidFill>
+                            <a:srgbClr val="222222"/>
+                          </a:solidFill>
+                        </a:defRPr>
+                      </a:pPr>
+                      <a:r>
+                        <a:t>1.2%</a:t>
+                      </a:r>
+                    </a:p>
+                  </a:txBody>
+                  <a:tcPr/>
+                </a:tc>
+              </a:tr>
+              <a:tr h="475488">
+                <a:tc>
+                  <a:txBody>
+                    <a:bodyPr/>
+                    <a:lstStyle/>
+                    <a:p>
+                      <a:pPr>
+                        <a:defRPr sz="1200">
+                          <a:solidFill>
+                            <a:srgbClr val="222222"/>
+                          </a:solidFill>
+                        </a:defRPr>
+                      </a:pPr>
+                      <a:r>
+                        <a:t>Stability across random seeds</a:t>
+                      </a:r>
+                    </a:p>
+                  </a:txBody>
+                  <a:tcPr/>
+                </a:tc>
+                <a:tc>
+                  <a:txBody>
+                    <a:bodyPr/>
+                    <a:lstStyle/>
+                    <a:p>
+                      <a:pPr>
+                        <a:defRPr sz="1200">
+                          <a:solidFill>
+                            <a:srgbClr val="222222"/>
+                          </a:solidFill>
+                        </a:defRPr>
+                      </a:pPr>
+                      <a:r>
+                        <a:t>ARI ≈ 0.46 (moderate)</a:t>
+                      </a:r>
+                    </a:p>
+                  </a:txBody>
+                  <a:tcPr/>
+                </a:tc>
+                <a:tc>
+                  <a:txBody>
+                    <a:bodyPr/>
+                    <a:lstStyle/>
+                    <a:p>
+                      <a:pPr>
+                        <a:defRPr sz="1200">
+                          <a:solidFill>
+                            <a:srgbClr val="222222"/>
+                          </a:solidFill>
+                        </a:defRPr>
+                      </a:pPr>
+                      <a:r>
+                        <a:t>Deterministic</a:t>
+                      </a:r>
+                    </a:p>
+                  </a:txBody>
+                  <a:tcPr/>
+                </a:tc>
+                <a:tc>
+                  <a:txBody>
+                    <a:bodyPr/>
+                    <a:lstStyle/>
+                    <a:p>
+                      <a:pPr>
+                        <a:defRPr sz="1200">
+                          <a:solidFill>
+                            <a:srgbClr val="222222"/>
+                          </a:solidFill>
+                        </a:defRPr>
+                      </a:pPr>
+                      <a:r>
+                        <a:t>ARI ≈ 1.00 (near-perfect)</a:t>
+                      </a:r>
+                    </a:p>
+                  </a:txBody>
+                  <a:tcPr/>
+                </a:tc>
+              </a:tr>
+              <a:tr h="475488">
+                <a:tc>
+                  <a:txBody>
+                    <a:bodyPr/>
+                    <a:lstStyle/>
+                    <a:p>
+                      <a:pPr>
+                        <a:defRPr sz="1200">
+                          <a:solidFill>
+                            <a:srgbClr val="222222"/>
+                          </a:solidFill>
+                        </a:defRPr>
+                      </a:pPr>
+                      <a:r>
+                        <a:t>Segment vs. held-out Country (Cramér's V)</a:t>
+                      </a:r>
+                    </a:p>
+                  </a:txBody>
+                  <a:tcPr/>
+                </a:tc>
+                <a:tc>
+                  <a:txBody>
+                    <a:bodyPr/>
+                    <a:lstStyle/>
+                    <a:p>
+                      <a:pPr>
+                        <a:defRPr sz="1200">
+                          <a:solidFill>
+                            <a:srgbClr val="222222"/>
+                          </a:solidFill>
+                        </a:defRPr>
+                      </a:pPr>
+                      <a:r>
+                        <a:t>0.285</a:t>
+                      </a:r>
+                    </a:p>
+                  </a:txBody>
+                  <a:tcPr/>
+                </a:tc>
+                <a:tc>
+                  <a:txBody>
+                    <a:bodyPr/>
+                    <a:lstStyle/>
+                    <a:p>
+                      <a:pPr>
+                        <a:defRPr sz="1200">
+                          <a:solidFill>
+                            <a:srgbClr val="222222"/>
+                          </a:solidFill>
+                        </a:defRPr>
+                      </a:pPr>
+                      <a:r>
+                        <a:t>0.310</a:t>
+                      </a:r>
+                    </a:p>
+                  </a:txBody>
+                  <a:tcPr/>
+                </a:tc>
+                <a:tc>
+                  <a:txBody>
+                    <a:bodyPr/>
+                    <a:lstStyle/>
+                    <a:p>
+                      <a:pPr>
+                        <a:defRPr sz="1200">
+                          <a:solidFill>
+                            <a:srgbClr val="222222"/>
+                          </a:solidFill>
+                        </a:defRPr>
+                      </a:pPr>
+                      <a:r>
+                        <a:t>0.318</a:t>
+                      </a:r>
+                    </a:p>
+                  </a:txBody>
+                  <a:tcPr/>
+                </a:tc>
+              </a:tr>
+            </a:tbl>
+          </a:graphicData>
+        </a:graphic>
+      </p:graphicFrame>
+      <p:sp>
+        <p:nvSpPr>
+          <p:cNvPr id="6" name="TextBox 5"/>
+          <p:cNvSpPr txBox="1"/>
+          <p:nvPr/>
+        </p:nvSpPr>
+        <p:spPr>
+          <a:xfrm>
+            <a:off x="548640" y="3977639"/>
+            <a:ext cx="11064240" cy="2651760"/>
+          </a:xfrm>
+          <a:prstGeom prst="rect">
+            <a:avLst/>
+          </a:prstGeom>
+          <a:noFill/>
+        </p:spPr>
+        <p:txBody>
+          <a:bodyPr wrap="square">
+            <a:normAutofit/>
+          </a:bodyPr>
+          <a:lstStyle/>
+          <a:p>
+            <a:pPr>
+              <a:spcAft>
+                <a:spcPts val="800"/>
+              </a:spcAft>
+            </a:pPr>
+            <a:r>
+              <a:rPr sz="1350">
+                <a:solidFill>
+                  <a:srgbClr val="1F2A44"/>
+                </a:solidFill>
+              </a:rPr>
+              <a:t>•  The naive version's one weak point: a cluster ~99% driven by shared missingness, not behavior — fixed by tiering + a missingness-aware distance metric (Q2).</a:t>
+            </a:r>
+          </a:p>
+          <a:p>
+            <a:pPr>
+              <a:spcAft>
+                <a:spcPts val="800"/>
+              </a:spcAft>
+            </a:pPr>
+            <a:r>
+              <a:rPr sz="1350">
+                <a:solidFill>
+                  <a:srgbClr val="1F2A44"/>
+                </a:solidFill>
+              </a:rPr>
+              <a:t>•  The tiered version's weak point: matching distance is coarse (13 discrete values) and chains under Agglomerative linkage — fixed by projecting into a continuous MCA space before clustering.</a:t>
+            </a:r>
+          </a:p>
+          <a:p>
+            <a:pPr>
+              <a:spcAft>
+                <a:spcPts val="800"/>
+              </a:spcAft>
+            </a:pPr>
+            <a:r>
+              <a:rPr sz="1350">
+                <a:solidFill>
+                  <a:srgbClr val="1F2A44"/>
+                </a:solidFill>
+              </a:rPr>
+              <a:t>•  A feature-reduction shortcut was also tested and rejected: dropping to 2-6 features pushes silhouette to 0.60-0.97, but discards half the behavioral signal the business needs represented (see Q2 slide) — the reported 0.393 is the honest, complete-data number.</a:t>
+            </a:r>
+          </a:p>
+        </p:txBody>
+      </p:sp>
+    </p:spTree>
+  </p:cSld>
+  <p:clrMapOvr>
+    <a:masterClrMapping/>
+  </p:clrMapOvr>
+</p:sld>
+</file>
+
+<file path=ppt/slides/slide6.xml><?xml version="1.0" encoding="utf-8"?>
+<p:sld xmlns:a="http://schemas.openxmlformats.org/drawingml/2006/main" xmlns:p="http://schemas.openxmlformats.org/presentationml/2006/main" xmlns:r="http://schemas.openxmlformats.org/officeDocument/2006/relationships">
+  <p:cSld>
+    <p:spTree>
+      <p:nvGrpSpPr>
+        <p:cNvPr id="1" name=""/>
+        <p:cNvGrpSpPr/>
+        <p:nvPr/>
+      </p:nvGrpSpPr>
+      <p:grpSpPr/>
+      <p:sp>
+        <p:nvSpPr>
+          <p:cNvPr id="2" name="TextBox 1"/>
+          <p:cNvSpPr txBox="1"/>
+          <p:nvPr/>
+        </p:nvSpPr>
+        <p:spPr>
+          <a:xfrm>
+            <a:off x="457200" y="274320"/>
+            <a:ext cx="11247120" cy="822960"/>
+          </a:xfrm>
+          <a:prstGeom prst="rect">
+            <a:avLst/>
+          </a:prstGeom>
+          <a:noFill/>
+        </p:spPr>
+        <p:txBody>
+          <a:bodyPr wrap="square">
+            <a:spAutoFit/>
+          </a:bodyPr>
+          <a:lstStyle/>
+          <a:p>
+            <a:r>
+              <a:rPr sz="2700" b="1">
+                <a:solidFill>
+                  <a:srgbClr val="1F2A44"/>
+                </a:solidFill>
+              </a:rPr>
+              <a:t>Q1. Cluster → Account Mapping &amp; Statistics</a:t>
+            </a:r>
+          </a:p>
+        </p:txBody>
+      </p:sp>
+      <p:sp>
+        <p:nvSpPr>
+          <p:cNvPr id="3" name="TextBox 2"/>
+          <p:cNvSpPr txBox="1"/>
+          <p:nvPr/>
+        </p:nvSpPr>
+        <p:spPr>
+          <a:xfrm>
+            <a:off x="457200" y="868680"/>
+            <a:ext cx="11247120" cy="365760"/>
+          </a:xfrm>
+          <a:prstGeom prst="rect">
+            <a:avLst/>
+          </a:prstGeom>
+          <a:noFill/>
+        </p:spPr>
+        <p:txBody>
+          <a:bodyPr wrap="none">
+            <a:spAutoFit/>
+          </a:bodyPr>
+          <a:lstStyle/>
+          <a:p>
+            <a:r>
+              <a:rPr sz="1350" i="1">
+                <a:solidFill>
+                  <a:srgbClr val="555555"/>
+                </a:solidFill>
+              </a:rPr>
+              <a:t>Full mapping in outputs/Cluster_Customer_Mapping.xlsx</a:t>
+            </a:r>
+          </a:p>
+        </p:txBody>
+      </p:sp>
+      <p:sp>
+        <p:nvSpPr>
+          <p:cNvPr id="4" name="Rectangle 3"/>
+          <p:cNvSpPr/>
+          <p:nvPr/>
+        </p:nvSpPr>
+        <p:spPr>
+          <a:xfrm>
+            <a:off x="457200" y="1188720"/>
+            <a:ext cx="11247120" cy="25400"/>
+          </a:xfrm>
+          <a:prstGeom prst="rect">
+            <a:avLst/>
+          </a:prstGeom>
+          <a:solidFill>
+            <a:srgbClr val="C0392B"/>
+          </a:solidFill>
+          <a:ln>
+            <a:noFill/>
+          </a:ln>
+        </p:spPr>
+        <p:style>
+          <a:lnRef idx="1">
+            <a:schemeClr val="accent1"/>
+          </a:lnRef>
+          <a:fillRef idx="3">
+            <a:schemeClr val="accent1"/>
+          </a:fillRef>
+          <a:effectRef idx="2">
+            <a:schemeClr val="accent1"/>
+          </a:effectRef>
+          <a:fontRef idx="minor">
+            <a:schemeClr val="lt1"/>
+          </a:fontRef>
+        </p:style>
+        <p:txBody>
+          <a:bodyPr rtlCol="0" anchor="ctr"/>
+          <a:lstStyle/>
+          <a:p>
+            <a:pPr algn="ctr"/>
+          </a:p>
+        </p:txBody>
+      </p:sp>
+      <p:graphicFrame>
+        <p:nvGraphicFramePr>
+          <p:cNvPr id="5" name="Table 4"/>
+          <p:cNvGraphicFramePr>
+            <a:graphicFrameLocks noGrp="1"/>
+          </p:cNvGraphicFramePr>
+          <p:nvPr/>
+        </p:nvGraphicFramePr>
+        <p:xfrm>
+          <a:off x="548640" y="1463040"/>
+          <a:ext cx="8686800" cy="2011680"/>
+        </p:xfrm>
+        <a:graphic>
+          <a:graphicData uri="http://schemas.openxmlformats.org/drawingml/2006/table">
+            <a:tbl>
+              <a:tblPr firstRow="1" bandRow="1">
+                <a:tableStyleId>{5C22544A-7EE6-4342-B048-85BDC9FD1C3A}</a:tableStyleId>
+              </a:tblPr>
+              <a:tblGrid>
+                <a:gridCol w="2171700"/>
+                <a:gridCol w="2171700"/>
+                <a:gridCol w="2171700"/>
+                <a:gridCol w="2171700"/>
+              </a:tblGrid>
+              <a:tr h="402336">
+                <a:tc>
+                  <a:txBody>
+                    <a:bodyPr/>
+                    <a:lstStyle/>
+                    <a:p>
+                      <a:pPr>
+                        <a:defRPr sz="1300" b="1">
+                          <a:solidFill>
+                            <a:srgbClr val="FFFFFF"/>
+                          </a:solidFill>
+                        </a:defRPr>
+                      </a:pPr>
+                      <a:r>
+                        <a:t>Cluster ID</a:t>
+                      </a:r>
+                    </a:p>
+                  </a:txBody>
+                  <a:tcPr>
+                    <a:solidFill>
+                      <a:srgbClr val="1F2A44"/>
+                    </a:solidFill>
+                  </a:tcPr>
+                </a:tc>
+                <a:tc>
+                  <a:txBody>
+                    <a:bodyPr/>
+                    <a:lstStyle/>
+                    <a:p>
+                      <a:pPr>
+                        <a:defRPr sz="1300" b="1">
+                          <a:solidFill>
+                            <a:srgbClr val="FFFFFF"/>
+                          </a:solidFill>
+                        </a:defRPr>
+                      </a:pPr>
+                      <a:r>
+                        <a:t>Cluster Name</a:t>
+                      </a:r>
+                    </a:p>
+                  </a:txBody>
+                  <a:tcPr>
+                    <a:solidFill>
+                      <a:srgbClr val="1F2A44"/>
+                    </a:solidFill>
+                  </a:tcPr>
+                </a:tc>
+                <a:tc>
+                  <a:txBody>
+                    <a:bodyPr/>
+                    <a:lstStyle/>
+                    <a:p>
+                      <a:pPr>
+                        <a:defRPr sz="1300" b="1">
+                          <a:solidFill>
+                            <a:srgbClr val="FFFFFF"/>
+                          </a:solidFill>
+                        </a:defRPr>
+                      </a:pPr>
+                      <a:r>
+                        <a:t>Size (fully-profiled base)</a:t>
+                      </a:r>
+                    </a:p>
+                  </a:txBody>
+                  <a:tcPr>
+                    <a:solidFill>
+                      <a:srgbClr val="1F2A44"/>
+                    </a:solidFill>
+                  </a:tcPr>
+                </a:tc>
+                <a:tc>
+                  <a:txBody>
+                    <a:bodyPr/>
+                    <a:lstStyle/>
+                    <a:p>
+                      <a:pPr>
+                        <a:defRPr sz="1300" b="1">
+                          <a:solidFill>
+                            <a:srgbClr val="FFFFFF"/>
+                          </a:solidFill>
+                        </a:defRPr>
+                      </a:pPr>
+                      <a:r>
+                        <a:t>% of Fully-Profiled</a:t>
+                      </a:r>
+                    </a:p>
+                  </a:txBody>
+                  <a:tcPr>
+                    <a:solidFill>
+                      <a:srgbClr val="1F2A44"/>
+                    </a:solidFill>
+                  </a:tcPr>
+                </a:tc>
+              </a:tr>
+              <a:tr h="402336">
+                <a:tc>
+                  <a:txBody>
+                    <a:bodyPr/>
+                    <a:lstStyle/>
+                    <a:p>
+                      <a:pPr>
+                        <a:defRPr sz="1300">
+                          <a:solidFill>
+                            <a:srgbClr val="222222"/>
+                          </a:solidFill>
+                        </a:defRPr>
+                      </a:pPr>
+                      <a:r>
+                        <a:t>0</a:t>
+                      </a:r>
+                    </a:p>
+                  </a:txBody>
+                  <a:tcPr/>
+                </a:tc>
+                <a:tc>
+                  <a:txBody>
+                    <a:bodyPr/>
+                    <a:lstStyle/>
+                    <a:p>
+                      <a:pPr>
+                        <a:defRPr sz="1300">
+                          <a:solidFill>
+                            <a:srgbClr val="222222"/>
+                          </a:solidFill>
+                        </a:defRPr>
+                      </a:pPr>
+                      <a:r>
+                        <a:t>Mid-Format High-Potential Accounts</a:t>
+                      </a:r>
+                    </a:p>
+                  </a:txBody>
+                  <a:tcPr/>
+                </a:tc>
+                <a:tc>
+                  <a:txBody>
+                    <a:bodyPr/>
+                    <a:lstStyle/>
+                    <a:p>
+                      <a:pPr>
+                        <a:defRPr sz="1300">
+                          <a:solidFill>
+                            <a:srgbClr val="222222"/>
+                          </a:solidFill>
+                        </a:defRPr>
+                      </a:pPr>
+                      <a:r>
+                        <a:t>268</a:t>
+                      </a:r>
+                    </a:p>
+                  </a:txBody>
+                  <a:tcPr/>
+                </a:tc>
+                <a:tc>
+                  <a:txBody>
+                    <a:bodyPr/>
+                    <a:lstStyle/>
+                    <a:p>
+                      <a:pPr>
+                        <a:defRPr sz="1300">
+                          <a:solidFill>
+                            <a:srgbClr val="222222"/>
+                          </a:solidFill>
+                        </a:defRPr>
+                      </a:pPr>
+                      <a:r>
+                        <a:t>35.6%</a:t>
+                      </a:r>
+                    </a:p>
+                  </a:txBody>
+                  <a:tcPr/>
+                </a:tc>
+              </a:tr>
+              <a:tr h="402336">
+                <a:tc>
+                  <a:txBody>
+                    <a:bodyPr/>
+                    <a:lstStyle/>
+                    <a:p>
+                      <a:pPr>
+                        <a:defRPr sz="1300">
+                          <a:solidFill>
+                            <a:srgbClr val="222222"/>
+                          </a:solidFill>
+                        </a:defRPr>
+                      </a:pPr>
+                      <a:r>
+                        <a:t>1</a:t>
+                      </a:r>
+                    </a:p>
+                  </a:txBody>
+                  <a:tcPr/>
+                </a:tc>
+                <a:tc>
+                  <a:txBody>
+                    <a:bodyPr/>
+                    <a:lstStyle/>
+                    <a:p>
+                      <a:pPr>
+                        <a:defRPr sz="1300">
+                          <a:solidFill>
+                            <a:srgbClr val="222222"/>
+                          </a:solidFill>
+                        </a:defRPr>
+                      </a:pPr>
+                      <a:r>
+                        <a:t>Small-Format Steady Base</a:t>
+                      </a:r>
+                    </a:p>
+                  </a:txBody>
+                  <a:tcPr/>
+                </a:tc>
+                <a:tc>
+                  <a:txBody>
+                    <a:bodyPr/>
+                    <a:lstStyle/>
+                    <a:p>
+                      <a:pPr>
+                        <a:defRPr sz="1300">
+                          <a:solidFill>
+                            <a:srgbClr val="222222"/>
+                          </a:solidFill>
+                        </a:defRPr>
+                      </a:pPr>
+                      <a:r>
+                        <a:t>266</a:t>
+                      </a:r>
+                    </a:p>
+                  </a:txBody>
+                  <a:tcPr/>
+                </a:tc>
+                <a:tc>
+                  <a:txBody>
+                    <a:bodyPr/>
+                    <a:lstStyle/>
+                    <a:p>
+                      <a:pPr>
+                        <a:defRPr sz="1300">
+                          <a:solidFill>
+                            <a:srgbClr val="222222"/>
+                          </a:solidFill>
+                        </a:defRPr>
+                      </a:pPr>
+                      <a:r>
+                        <a:t>35.3%</a:t>
+                      </a:r>
+                    </a:p>
+                  </a:txBody>
+                  <a:tcPr/>
+                </a:tc>
+              </a:tr>
+              <a:tr h="402336">
+                <a:tc>
+                  <a:txBody>
+                    <a:bodyPr/>
+                    <a:lstStyle/>
+                    <a:p>
+                      <a:pPr>
+                        <a:defRPr sz="1300">
+                          <a:solidFill>
+                            <a:srgbClr val="222222"/>
+                          </a:solidFill>
+                        </a:defRPr>
+                      </a:pPr>
+                      <a:r>
+                        <a:t>2</a:t>
+                      </a:r>
+                    </a:p>
+                  </a:txBody>
+                  <a:tcPr/>
+                </a:tc>
+                <a:tc>
+                  <a:txBody>
+                    <a:bodyPr/>
+                    <a:lstStyle/>
+                    <a:p>
+                      <a:pPr>
+                        <a:defRPr sz="1300">
+                          <a:solidFill>
+                            <a:srgbClr val="222222"/>
+                          </a:solidFill>
+                        </a:defRPr>
+                      </a:pPr>
+                      <a:r>
+                        <a:t>Mature Small-Format, Low-Headroom Accounts</a:t>
+                      </a:r>
+                    </a:p>
+                  </a:txBody>
+                  <a:tcPr/>
+                </a:tc>
+                <a:tc>
+                  <a:txBody>
+                    <a:bodyPr/>
+                    <a:lstStyle/>
+                    <a:p>
+                      <a:pPr>
+                        <a:defRPr sz="1300">
+                          <a:solidFill>
+                            <a:srgbClr val="222222"/>
+                          </a:solidFill>
+                        </a:defRPr>
+                      </a:pPr>
+                      <a:r>
+                        <a:t>108</a:t>
+                      </a:r>
+                    </a:p>
+                  </a:txBody>
+                  <a:tcPr/>
+                </a:tc>
+                <a:tc>
+                  <a:txBody>
+                    <a:bodyPr/>
+                    <a:lstStyle/>
+                    <a:p>
+                      <a:pPr>
+                        <a:defRPr sz="1300">
+                          <a:solidFill>
+                            <a:srgbClr val="222222"/>
+                          </a:solidFill>
+                        </a:defRPr>
+                      </a:pPr>
+                      <a:r>
+                        <a:t>14.3%</a:t>
+                      </a:r>
+                    </a:p>
+                  </a:txBody>
+                  <a:tcPr/>
+                </a:tc>
+              </a:tr>
+              <a:tr h="402336">
+                <a:tc>
+                  <a:txBody>
+                    <a:bodyPr/>
+                    <a:lstStyle/>
+                    <a:p>
+                      <a:pPr>
+                        <a:defRPr sz="1300">
+                          <a:solidFill>
+                            <a:srgbClr val="222222"/>
+                          </a:solidFill>
+                        </a:defRPr>
+                      </a:pPr>
+                      <a:r>
+                        <a:t>3</a:t>
+                      </a:r>
+                    </a:p>
+                  </a:txBody>
+                  <a:tcPr/>
+                </a:tc>
+                <a:tc>
+                  <a:txBody>
+                    <a:bodyPr/>
+                    <a:lstStyle/>
+                    <a:p>
+                      <a:pPr>
+                        <a:defRPr sz="1300">
+                          <a:solidFill>
+                            <a:srgbClr val="222222"/>
+                          </a:solidFill>
+                        </a:defRPr>
+                      </a:pPr>
+                      <a:r>
+                        <a:t>Premium Large-Format Growth Leaders</a:t>
+                      </a:r>
+                    </a:p>
+                  </a:txBody>
+                  <a:tcPr/>
+                </a:tc>
+                <a:tc>
+                  <a:txBody>
+                    <a:bodyPr/>
+                    <a:lstStyle/>
+                    <a:p>
+                      <a:pPr>
+                        <a:defRPr sz="1300">
+                          <a:solidFill>
+                            <a:srgbClr val="222222"/>
+                          </a:solidFill>
+                        </a:defRPr>
+                      </a:pPr>
+                      <a:r>
+                        <a:t>111</a:t>
+                      </a:r>
+                    </a:p>
+                  </a:txBody>
+                  <a:tcPr/>
+                </a:tc>
+                <a:tc>
+                  <a:txBody>
+                    <a:bodyPr/>
+                    <a:lstStyle/>
+                    <a:p>
+                      <a:pPr>
+                        <a:defRPr sz="1300">
+                          <a:solidFill>
+                            <a:srgbClr val="222222"/>
+                          </a:solidFill>
+                        </a:defRPr>
+                      </a:pPr>
+                      <a:r>
+                        <a:t>14.7%</a:t>
+                      </a:r>
+                    </a:p>
+                  </a:txBody>
+                  <a:tcPr/>
+                </a:tc>
+              </a:tr>
+            </a:tbl>
+          </a:graphicData>
+        </a:graphic>
+      </p:graphicFrame>
+      <p:sp>
+        <p:nvSpPr>
+          <p:cNvPr id="6" name="TextBox 5"/>
+          <p:cNvSpPr txBox="1"/>
+          <p:nvPr/>
+        </p:nvSpPr>
+        <p:spPr>
+          <a:xfrm>
+            <a:off x="548640" y="3657600"/>
+            <a:ext cx="11064240" cy="3063240"/>
+          </a:xfrm>
+          <a:prstGeom prst="rect">
+            <a:avLst/>
+          </a:prstGeom>
+          <a:noFill/>
+        </p:spPr>
+        <p:txBody>
+          <a:bodyPr wrap="square">
+            <a:normAutofit/>
+          </a:bodyPr>
+          <a:lstStyle/>
+          <a:p>
+            <a:pPr>
+              <a:spcAft>
+                <a:spcPts val="800"/>
+              </a:spcAft>
+            </a:pPr>
+            <a:r>
+              <a:rPr sz="1250">
+                <a:solidFill>
+                  <a:srgbClr val="1F2A44"/>
+                </a:solidFill>
+              </a:rPr>
+              <a:t>•  Names are derived programmatically from each cluster's dominant Casino_Size_Segment (format) x Market_Share/Potential (headroom) — not hardcoded by index, since K-Means label order isn't guaranteed stable.</a:t>
+            </a:r>
+          </a:p>
+          <a:p>
+            <a:pPr>
+              <a:spcAft>
+                <a:spcPts val="800"/>
+              </a:spcAft>
+            </a:pPr>
+            <a:r>
+              <a:rPr sz="1250">
+                <a:solidFill>
+                  <a:srgbClr val="1F2A44"/>
+                </a:solidFill>
+              </a:rPr>
+              <a:t>•  Mid-Format High-Potential Accounts: medium casino size (97%), high market potential (99%), mid revenue.</a:t>
+            </a:r>
+          </a:p>
+          <a:p>
+            <a:pPr>
+              <a:spcAft>
+                <a:spcPts val="800"/>
+              </a:spcAft>
+            </a:pPr>
+            <a:r>
+              <a:rPr sz="1250">
+                <a:solidFill>
+                  <a:srgbClr val="1F2A44"/>
+                </a:solidFill>
+              </a:rPr>
+              <a:t>•  Small-Format Steady Base: small casino size (100%), moderate potential, low revenue but profitable — the largest group.</a:t>
+            </a:r>
+          </a:p>
+          <a:p>
+            <a:pPr>
+              <a:spcAft>
+                <a:spcPts val="800"/>
+              </a:spcAft>
+            </a:pPr>
+            <a:r>
+              <a:rPr sz="1250">
+                <a:solidFill>
+                  <a:srgbClr val="1F2A44"/>
+                </a:solidFill>
+              </a:rPr>
+              <a:t>•  Mature Small-Format, Low-Headroom Accounts: small format, but Venture Creed already holds high market share (99%) — limited room to grow further.</a:t>
+            </a:r>
+          </a:p>
+          <a:p>
+            <a:pPr>
+              <a:spcAft>
+                <a:spcPts val="800"/>
+              </a:spcAft>
+            </a:pPr>
+            <a:r>
+              <a:rPr sz="1250">
+                <a:solidFill>
+                  <a:srgbClr val="1F2A44"/>
+                </a:solidFill>
+              </a:rPr>
+              <a:t>•  Premium Large-Format Growth Leaders: large casino size (100%), very high market potential (87%), highest propensity to buy (65%) — top marketing-investment target.</a:t>
+            </a:r>
+          </a:p>
+          <a:p>
+            <a:pPr>
+              <a:spcAft>
+                <a:spcPts val="800"/>
+              </a:spcAft>
+            </a:pPr>
+            <a:r>
+              <a:rPr sz="1250">
+                <a:solidFill>
+                  <a:srgbClr val="1F2A44"/>
+                </a:solidFill>
+              </a:rPr>
+              <a:t>•  Plus: Revenue-Tracked/Territory-Pending (n=205), Territory-Scored/Revenue-Pending (n=139), Partially Profiled Mixed (n=144), and Not-Yet-Profiled (n=1,789) — held outside the behavioral model (see Q2).</a:t>
+            </a:r>
+          </a:p>
+        </p:txBody>
+      </p:sp>
+    </p:spTree>
+  </p:cSld>
+  <p:clrMapOvr>
+    <a:masterClrMapping/>
+  </p:clrMapOvr>
+</p:sld>
+</file>
+
+<file path=ppt/slides/slide7.xml><?xml version="1.0" encoding="utf-8"?>
+<p:sld xmlns:a="http://schemas.openxmlformats.org/drawingml/2006/main" xmlns:p="http://schemas.openxmlformats.org/presentationml/2006/main" xmlns:r="http://schemas.openxmlformats.org/officeDocument/2006/relationships">
+  <p:cSld>
+    <p:spTree>
+      <p:nvGrpSpPr>
+        <p:cNvPr id="1" name=""/>
+        <p:cNvGrpSpPr/>
+        <p:nvPr/>
+      </p:nvGrpSpPr>
+      <p:grpSpPr/>
+      <p:sp>
+        <p:nvSpPr>
+          <p:cNvPr id="2" name="TextBox 1"/>
+          <p:cNvSpPr txBox="1"/>
+          <p:nvPr/>
+        </p:nvSpPr>
+        <p:spPr>
+          <a:xfrm>
+            <a:off x="457200" y="274320"/>
+            <a:ext cx="11247120" cy="822960"/>
+          </a:xfrm>
+          <a:prstGeom prst="rect">
+            <a:avLst/>
+          </a:prstGeom>
+          <a:noFill/>
+        </p:spPr>
+        <p:txBody>
+          <a:bodyPr wrap="square">
+            <a:spAutoFit/>
+          </a:bodyPr>
+          <a:lstStyle/>
+          <a:p>
+            <a:r>
+              <a:rPr sz="2700" b="1">
+                <a:solidFill>
+                  <a:srgbClr val="1F2A44"/>
+                </a:solidFill>
+              </a:rPr>
+              <a:t>Q2. Feature Selection Approach</a:t>
+            </a:r>
+          </a:p>
+        </p:txBody>
+      </p:sp>
+      <p:sp>
+        <p:nvSpPr>
+          <p:cNvPr id="3" name="TextBox 2"/>
+          <p:cNvSpPr txBox="1"/>
+          <p:nvPr/>
+        </p:nvSpPr>
+        <p:spPr>
+          <a:xfrm>
+            <a:off x="457200" y="868680"/>
+            <a:ext cx="11247120" cy="365760"/>
+          </a:xfrm>
+          <a:prstGeom prst="rect">
+            <a:avLst/>
+          </a:prstGeom>
+          <a:noFill/>
+        </p:spPr>
+        <p:txBody>
+          <a:bodyPr wrap="none">
+            <a:spAutoFit/>
+          </a:bodyPr>
+          <a:lstStyle/>
+          <a:p>
+            <a:r>
+              <a:rPr sz="1350" i="1">
+                <a:solidFill>
+                  <a:srgbClr val="555555"/>
+                </a:solidFill>
+              </a:rPr>
+              <a:t>What went into the model, what didn't, and what was tested and rejected</a:t>
+            </a:r>
+          </a:p>
+        </p:txBody>
+      </p:sp>
+      <p:sp>
+        <p:nvSpPr>
+          <p:cNvPr id="4" name="Rectangle 3"/>
+          <p:cNvSpPr/>
+          <p:nvPr/>
+        </p:nvSpPr>
+        <p:spPr>
+          <a:xfrm>
+            <a:off x="457200" y="1188720"/>
+            <a:ext cx="11247120" cy="25400"/>
+          </a:xfrm>
+          <a:prstGeom prst="rect">
+            <a:avLst/>
+          </a:prstGeom>
+          <a:solidFill>
+            <a:srgbClr val="C0392B"/>
+          </a:solidFill>
+          <a:ln>
+            <a:noFill/>
+          </a:ln>
+        </p:spPr>
+        <p:style>
+          <a:lnRef idx="1">
+            <a:schemeClr val="accent1"/>
+          </a:lnRef>
+          <a:fillRef idx="3">
+            <a:schemeClr val="accent1"/>
+          </a:fillRef>
+          <a:effectRef idx="2">
+            <a:schemeClr val="accent1"/>
+          </a:effectRef>
+          <a:fontRef idx="minor">
+            <a:schemeClr val="lt1"/>
+          </a:fontRef>
+        </p:style>
+        <p:txBody>
+          <a:bodyPr rtlCol="0" anchor="ctr"/>
+          <a:lstStyle/>
+          <a:p>
+            <a:pPr algn="ctr"/>
+          </a:p>
+        </p:txBody>
+      </p:sp>
+      <p:sp>
+        <p:nvSpPr>
+          <p:cNvPr id="5" name="TextBox 4"/>
+          <p:cNvSpPr txBox="1"/>
+          <p:nvPr/>
+        </p:nvSpPr>
+        <p:spPr>
+          <a:xfrm>
+            <a:off x="457200" y="1417320"/>
+            <a:ext cx="11247120" cy="5349240"/>
+          </a:xfrm>
+          <a:prstGeom prst="rect">
+            <a:avLst/>
+          </a:prstGeom>
+          <a:noFill/>
+        </p:spPr>
+        <p:txBody>
+          <a:bodyPr wrap="square">
+            <a:normAutofit/>
+          </a:bodyPr>
+          <a:lstStyle/>
+          <a:p>
+            <a:pPr>
+              <a:spcAft>
+                <a:spcPts val="800"/>
+              </a:spcAft>
+            </a:pPr>
+            <a:r>
               <a:rPr sz="1450">
                 <a:solidFill>
                   <a:srgbClr val="1F2A44"/>
                 </a:solidFill>
               </a:rPr>
-              <a:t>•  Ongoing monitoring: re-run on a fixed cadence (e.g. quarterly) as more customers become “scored”; track migration between clusters/out of “not-yet-profiled” to monitor drift.</a:t>
+              <a:t>•  Dropped — Customer_ID, Street, Postal_Code: near-unique identifiers (Postal_Code has 1,124 distinct values); no behavioral signal, would dominate a matching distance without generalizing.</a:t>
+            </a:r>
+          </a:p>
+          <a:p>
+            <a:pPr>
+              <a:spcAft>
+                <a:spcPts val="800"/>
+              </a:spcAft>
+            </a:pPr>
+            <a:r>
+              <a:rPr sz="1450">
+                <a:solidFill>
+                  <a:srgbClr val="1F2A44"/>
+                </a:solidFill>
+              </a:rPr>
+              <a:t>•  Dropped — City, State_Code, Country: geographic behavior is already captured by purpose-built features (Competitiveness_Flag, Volume_Segment, Density_Segment); raw geography would double-count that signal and add 1,245/61/33-level nominal noise.</a:t>
+            </a:r>
+          </a:p>
+          <a:p>
+            <a:pPr>
+              <a:spcAft>
+                <a:spcPts val="800"/>
+              </a:spcAft>
+            </a:pPr>
+            <a:r>
+              <a:rPr sz="1450">
+                <a:solidFill>
+                  <a:srgbClr val="1F2A44"/>
+                </a:solidFill>
+              </a:rPr>
+              <a:t>•  Kept — all 12 business segment columns: tested reducing to fewer features (a smaller model scores much higher — 0.97 silhouette at just 2 features) and explicitly REJECTED it: at that point the model is just re-deriving a crosstab of 2 raw fields, discarding Profit/Churn/Competitiveness/Volume/Density entirely. All 12 are kept as the more complete, honest choice.</a:t>
+            </a:r>
+          </a:p>
+          <a:p>
+            <a:pPr>
+              <a:spcAft>
+                <a:spcPts val="800"/>
+              </a:spcAft>
+            </a:pPr>
+            <a:r>
+              <a:rPr sz="1450">
+                <a:solidFill>
+                  <a:srgbClr val="1F2A44"/>
+                </a:solidFill>
+              </a:rPr>
+              <a:t>•  Missingness handled by tiering, not row-dropping: 59% of customers have all 6 core segments unset simultaneously (dropping them would remove most of the customer base) — they're split into explicit, actionable data-completeness segments instead of being blended into the model as noise.</a:t>
+            </a:r>
+          </a:p>
+          <a:p>
+            <a:pPr>
+              <a:spcAft>
+                <a:spcPts val="800"/>
+              </a:spcAft>
+            </a:pPr>
+            <a:r>
+              <a:rPr sz="1450">
+                <a:solidFill>
+                  <a:srgbClr val="1F2A44"/>
+                </a:solidFill>
+              </a:rPr>
+              <a:t>•  Missing markers (“None”, “-”, NaN) unified into one explicit category, then further refined via a Gower-style distance that excludes jointly-missing features from each pairwise comparison — so shared “don't know” never counts as similarity.</a:t>
+            </a:r>
+          </a:p>
+        </p:txBody>
+      </p:sp>
+    </p:spTree>
+  </p:cSld>
+  <p:clrMapOvr>
+    <a:masterClrMapping/>
+  </p:clrMapOvr>
+</p:sld>
+</file>
+
+<file path=ppt/slides/slide8.xml><?xml version="1.0" encoding="utf-8"?>
+<p:sld xmlns:a="http://schemas.openxmlformats.org/drawingml/2006/main" xmlns:p="http://schemas.openxmlformats.org/presentationml/2006/main" xmlns:r="http://schemas.openxmlformats.org/officeDocument/2006/relationships">
+  <p:cSld>
+    <p:spTree>
+      <p:nvGrpSpPr>
+        <p:cNvPr id="1" name=""/>
+        <p:cNvGrpSpPr/>
+        <p:nvPr/>
+      </p:nvGrpSpPr>
+      <p:grpSpPr/>
+      <p:sp>
+        <p:nvSpPr>
+          <p:cNvPr id="2" name="TextBox 1"/>
+          <p:cNvSpPr txBox="1"/>
+          <p:nvPr/>
+        </p:nvSpPr>
+        <p:spPr>
+          <a:xfrm>
+            <a:off x="457200" y="274320"/>
+            <a:ext cx="11247120" cy="822960"/>
+          </a:xfrm>
+          <a:prstGeom prst="rect">
+            <a:avLst/>
+          </a:prstGeom>
+          <a:noFill/>
+        </p:spPr>
+        <p:txBody>
+          <a:bodyPr wrap="square">
+            <a:spAutoFit/>
+          </a:bodyPr>
+          <a:lstStyle/>
+          <a:p>
+            <a:r>
+              <a:rPr sz="2700" b="1">
+                <a:solidFill>
+                  <a:srgbClr val="1F2A44"/>
+                </a:solidFill>
+              </a:rPr>
+              <a:t>Q3. 2-D Visualization of Clusters</a:t>
+            </a:r>
+          </a:p>
+        </p:txBody>
+      </p:sp>
+      <p:sp>
+        <p:nvSpPr>
+          <p:cNvPr id="3" name="TextBox 2"/>
+          <p:cNvSpPr txBox="1"/>
+          <p:nvPr/>
+        </p:nvSpPr>
+        <p:spPr>
+          <a:xfrm>
+            <a:off x="457200" y="868680"/>
+            <a:ext cx="11247120" cy="365760"/>
+          </a:xfrm>
+          <a:prstGeom prst="rect">
+            <a:avLst/>
+          </a:prstGeom>
+          <a:noFill/>
+        </p:spPr>
+        <p:txBody>
+          <a:bodyPr wrap="none">
+            <a:spAutoFit/>
+          </a:bodyPr>
+          <a:lstStyle/>
+          <a:p>
+            <a:r>
+              <a:rPr sz="1350" i="1">
+                <a:solidFill>
+                  <a:srgbClr val="555555"/>
+                </a:solidFill>
+              </a:rPr>
+              <a:t>MCA projection, colored by final segment</a:t>
+            </a:r>
+          </a:p>
+        </p:txBody>
+      </p:sp>
+      <p:sp>
+        <p:nvSpPr>
+          <p:cNvPr id="4" name="Rectangle 3"/>
+          <p:cNvSpPr/>
+          <p:nvPr/>
+        </p:nvSpPr>
+        <p:spPr>
+          <a:xfrm>
+            <a:off x="457200" y="1188720"/>
+            <a:ext cx="11247120" cy="25400"/>
+          </a:xfrm>
+          <a:prstGeom prst="rect">
+            <a:avLst/>
+          </a:prstGeom>
+          <a:solidFill>
+            <a:srgbClr val="C0392B"/>
+          </a:solidFill>
+          <a:ln>
+            <a:noFill/>
+          </a:ln>
+        </p:spPr>
+        <p:style>
+          <a:lnRef idx="1">
+            <a:schemeClr val="accent1"/>
+          </a:lnRef>
+          <a:fillRef idx="3">
+            <a:schemeClr val="accent1"/>
+          </a:fillRef>
+          <a:effectRef idx="2">
+            <a:schemeClr val="accent1"/>
+          </a:effectRef>
+          <a:fontRef idx="minor">
+            <a:schemeClr val="lt1"/>
+          </a:fontRef>
+        </p:style>
+        <p:txBody>
+          <a:bodyPr rtlCol="0" anchor="ctr"/>
+          <a:lstStyle/>
+          <a:p>
+            <a:pPr algn="ctr"/>
+          </a:p>
+        </p:txBody>
+      </p:sp>
+      <p:pic>
+        <p:nvPicPr>
+          <p:cNvPr id="5" name="Picture 4" descr="cluster_2d_plot.png"/>
+          <p:cNvPicPr>
+            <a:picLocks noChangeAspect="1"/>
+          </p:cNvPicPr>
+          <p:nvPr/>
+        </p:nvPicPr>
+        <p:blipFill>
+          <a:blip r:embed="rId2"/>
+          <a:stretch>
+            <a:fillRect/>
+          </a:stretch>
+        </p:blipFill>
+        <p:spPr>
+          <a:xfrm>
+            <a:off x="2651760" y="1371600"/>
+            <a:ext cx="6301753" cy="4892040"/>
+          </a:xfrm>
+          <a:prstGeom prst="rect">
+            <a:avLst/>
+          </a:prstGeom>
+        </p:spPr>
+      </p:pic>
+      <p:sp>
+        <p:nvSpPr>
+          <p:cNvPr id="6" name="TextBox 5"/>
+          <p:cNvSpPr txBox="1"/>
+          <p:nvPr/>
+        </p:nvSpPr>
+        <p:spPr>
+          <a:xfrm>
+            <a:off x="457200" y="6355080"/>
+            <a:ext cx="11247120" cy="457200"/>
+          </a:xfrm>
+          <a:prstGeom prst="rect">
+            <a:avLst/>
+          </a:prstGeom>
+          <a:noFill/>
+        </p:spPr>
+        <p:txBody>
+          <a:bodyPr wrap="none">
+            <a:spAutoFit/>
+          </a:bodyPr>
+          <a:lstStyle/>
+          <a:p>
+            <a:r>
+              <a:rPr sz="1100" i="1">
+                <a:solidFill>
+                  <a:srgbClr val="555555"/>
+                </a:solidFill>
+              </a:rPr>
+              <a:t>This 2-D view fits MCA with only 2 components (21.7% inertia) purely for plotting, while the actual clustering model uses 10 components (60.3% inertia) — some overlap between behavioral clusters here is a plotting limitation, not evidence of poor separation (real silhouette in the full space: 0.393).</a:t>
+            </a:r>
+          </a:p>
+        </p:txBody>
+      </p:sp>
+    </p:spTree>
+  </p:cSld>
+  <p:clrMapOvr>
+    <a:masterClrMapping/>
+  </p:clrMapOvr>
+</p:sld>
+</file>
+
+<file path=ppt/slides/slide9.xml><?xml version="1.0" encoding="utf-8"?>
+<p:sld xmlns:a="http://schemas.openxmlformats.org/drawingml/2006/main" xmlns:p="http://schemas.openxmlformats.org/presentationml/2006/main" xmlns:r="http://schemas.openxmlformats.org/officeDocument/2006/relationships">
+  <p:cSld>
+    <p:spTree>
+      <p:nvGrpSpPr>
+        <p:cNvPr id="1" name=""/>
+        <p:cNvGrpSpPr/>
+        <p:nvPr/>
+      </p:nvGrpSpPr>
+      <p:grpSpPr/>
+      <p:sp>
+        <p:nvSpPr>
+          <p:cNvPr id="2" name="TextBox 1"/>
+          <p:cNvSpPr txBox="1"/>
+          <p:nvPr/>
+        </p:nvSpPr>
+        <p:spPr>
+          <a:xfrm>
+            <a:off x="457200" y="274320"/>
+            <a:ext cx="11247120" cy="822960"/>
+          </a:xfrm>
+          <a:prstGeom prst="rect">
+            <a:avLst/>
+          </a:prstGeom>
+          <a:noFill/>
+        </p:spPr>
+        <p:txBody>
+          <a:bodyPr wrap="square">
+            <a:spAutoFit/>
+          </a:bodyPr>
+          <a:lstStyle/>
+          <a:p>
+            <a:r>
+              <a:rPr sz="2700" b="1">
+                <a:solidFill>
+                  <a:srgbClr val="1F2A44"/>
+                </a:solidFill>
+              </a:rPr>
+              <a:t>Q4. EDA &amp; Outlier Detection</a:t>
+            </a:r>
+          </a:p>
+        </p:txBody>
+      </p:sp>
+      <p:sp>
+        <p:nvSpPr>
+          <p:cNvPr id="3" name="TextBox 2"/>
+          <p:cNvSpPr txBox="1"/>
+          <p:nvPr/>
+        </p:nvSpPr>
+        <p:spPr>
+          <a:xfrm>
+            <a:off x="457200" y="868680"/>
+            <a:ext cx="11247120" cy="365760"/>
+          </a:xfrm>
+          <a:prstGeom prst="rect">
+            <a:avLst/>
+          </a:prstGeom>
+          <a:noFill/>
+        </p:spPr>
+        <p:txBody>
+          <a:bodyPr wrap="none">
+            <a:spAutoFit/>
+          </a:bodyPr>
+          <a:lstStyle/>
+          <a:p>
+            <a:r>
+              <a:rPr sz="1350" i="1">
+                <a:solidFill>
+                  <a:srgbClr val="555555"/>
+                </a:solidFill>
+              </a:rPr>
+              <a:t>Two categorical-appropriate methods, applied together</a:t>
+            </a:r>
+          </a:p>
+        </p:txBody>
+      </p:sp>
+      <p:sp>
+        <p:nvSpPr>
+          <p:cNvPr id="4" name="Rectangle 3"/>
+          <p:cNvSpPr/>
+          <p:nvPr/>
+        </p:nvSpPr>
+        <p:spPr>
+          <a:xfrm>
+            <a:off x="457200" y="1188720"/>
+            <a:ext cx="11247120" cy="25400"/>
+          </a:xfrm>
+          <a:prstGeom prst="rect">
+            <a:avLst/>
+          </a:prstGeom>
+          <a:solidFill>
+            <a:srgbClr val="C0392B"/>
+          </a:solidFill>
+          <a:ln>
+            <a:noFill/>
+          </a:ln>
+        </p:spPr>
+        <p:style>
+          <a:lnRef idx="1">
+            <a:schemeClr val="accent1"/>
+          </a:lnRef>
+          <a:fillRef idx="3">
+            <a:schemeClr val="accent1"/>
+          </a:fillRef>
+          <a:effectRef idx="2">
+            <a:schemeClr val="accent1"/>
+          </a:effectRef>
+          <a:fontRef idx="minor">
+            <a:schemeClr val="lt1"/>
+          </a:fontRef>
+        </p:style>
+        <p:txBody>
+          <a:bodyPr rtlCol="0" anchor="ctr"/>
+          <a:lstStyle/>
+          <a:p>
+            <a:pPr algn="ctr"/>
+          </a:p>
+        </p:txBody>
+      </p:sp>
+      <p:sp>
+        <p:nvSpPr>
+          <p:cNvPr id="5" name="TextBox 4"/>
+          <p:cNvSpPr txBox="1"/>
+          <p:nvPr/>
+        </p:nvSpPr>
+        <p:spPr>
+          <a:xfrm>
+            <a:off x="457200" y="1417320"/>
+            <a:ext cx="11247120" cy="5349240"/>
+          </a:xfrm>
+          <a:prstGeom prst="rect">
+            <a:avLst/>
+          </a:prstGeom>
+          <a:noFill/>
+        </p:spPr>
+        <p:txBody>
+          <a:bodyPr wrap="square">
+            <a:normAutofit/>
+          </a:bodyPr>
+          <a:lstStyle/>
+          <a:p>
+            <a:pPr>
+              <a:spcAft>
+                <a:spcPts val="800"/>
+              </a:spcAft>
+            </a:pPr>
+            <a:r>
+              <a:rPr sz="1500">
+                <a:solidFill>
+                  <a:srgbClr val="1F2A44"/>
+                </a:solidFill>
+              </a:rPr>
+              <a:t>•  EDA covered: per-column value distributions/cardinality, 3 different null markers, the two-block missingness structure across the 6 core segments, and duplicate/casing/format checks on address fields (full detail in the notebook and Q5).</a:t>
+            </a:r>
+          </a:p>
+          <a:p>
+            <a:pPr>
+              <a:spcAft>
+                <a:spcPts val="800"/>
+              </a:spcAft>
+            </a:pPr>
+            <a:r>
+              <a:rPr sz="1500">
+                <a:solidFill>
+                  <a:srgbClr val="1F2A44"/>
+                </a:solidFill>
+              </a:rPr>
+              <a:t>•  No numeric features exist, so z-score / IQR-on-raw-values methods don't apply — two categorical-native methods were used instead:</a:t>
+            </a:r>
+          </a:p>
+          <a:p>
+            <a:pPr>
+              <a:spcAft>
+                <a:spcPts val="800"/>
+              </a:spcAft>
+            </a:pPr>
+            <a:r>
+              <a:rPr sz="1350">
+                <a:solidFill>
+                  <a:srgbClr val="555555"/>
+                </a:solidFill>
+              </a:rPr>
+              <a:t>      -  Attribute Value Frequency (AVF): average population frequency of a customer's own category values across all 12 features; the rarest 5% are flagged (63 customers). Standard technique for categorical outlier detection (Koufakou &amp; Georgiopoulos, 2010) — no distance metric needed.</a:t>
+            </a:r>
+          </a:p>
+          <a:p>
+            <a:pPr>
+              <a:spcAft>
+                <a:spcPts val="800"/>
+              </a:spcAft>
+            </a:pPr>
+            <a:r>
+              <a:rPr sz="1350">
+                <a:solidFill>
+                  <a:srgbClr val="555555"/>
+                </a:solidFill>
+              </a:rPr>
+              <a:t>      -  Distance-to-cluster-medoid: within the fully-profiled tier, Gower-style dissimilarity from each customer to the most central point of their own cluster; a 95th-percentile cutoff is used since this distance is bounded (45 customers flagged).</a:t>
+            </a:r>
+          </a:p>
+          <a:p>
+            <a:pPr>
+              <a:spcAft>
+                <a:spcPts val="800"/>
+              </a:spcAft>
+            </a:pPr>
+            <a:r>
+              <a:rPr sz="1500">
+                <a:solidFill>
+                  <a:srgbClr val="1F2A44"/>
+                </a:solidFill>
+              </a:rPr>
+              <a:t>•  Union of both methods: 103 customers flagged — exported to the “Outliers” sheet of the Excel workbook for manual review, not automatic exclusion (they may be strategically important large/unusual accounts, not errors).</a:t>
             </a:r>
           </a:p>
         </p:txBody>
